--- a/docs/晴愈AI-决赛演示.pptx
+++ b/docs/晴愈AI-决赛演示.pptx
@@ -15,9 +15,10 @@
     <p:sldId id="263" r:id="rId9"/>
     <p:sldId id="264" r:id="rId10"/>
     <p:sldId id="265" r:id="rId11"/>
+    <p:sldId id="266" r:id="rId12"/>
   </p:sldIdLst>
   <p:notesMasterIdLst>
-    <p:notesMasterId r:id="rId12"/>
+    <p:notesMasterId r:id="rId13"/>
   </p:notesMasterIdLst>
   <p:sldSz cx="9144000" cy="5143500"/>
   <p:notesSz cx="5143500" cy="9144000"/>
@@ -623,6 +624,94 @@
             <a:fld id="{F7021451-1387-4CA6-816F-3879F97B5CBC}" type="slidenum">
               <a:rPr lang="en-US"/>
               <a:t>10</a:t>
+            </a:fld>
+            <a:endParaRPr lang="en-US"/>
+          </a:p>
+        </p:txBody>
+      </p:sp>
+    </p:spTree>
+    <p:extLst>
+      <p:ext uri="{BB962C8B-B14F-4D97-AF65-F5344CB8AC3E}">
+        <p14:creationId xmlns:p14="http://schemas.microsoft.com/office/powerpoint/2010/main" val="1024086991"/>
+      </p:ext>
+    </p:extLst>
+  </p:cSld>
+  <p:clrMapOvr>
+    <a:masterClrMapping/>
+  </p:clrMapOvr>
+</p:notes>
+</file>
+
+<file path=ppt/notesSlides/notesSlide11.xml><?xml version="1.0" encoding="utf-8"?>
+<p:notes xmlns:a="http://schemas.openxmlformats.org/drawingml/2006/main" xmlns:r="http://schemas.openxmlformats.org/officeDocument/2006/relationships" xmlns:p="http://schemas.openxmlformats.org/presentationml/2006/main">
+  <p:cSld>
+    <p:spTree>
+      <p:nvGrpSpPr>
+        <p:cNvPr id="1" name=""/>
+        <p:cNvGrpSpPr/>
+        <p:nvPr/>
+      </p:nvGrpSpPr>
+      <p:grpSpPr>
+        <a:xfrm>
+          <a:off x="0" y="0"/>
+          <a:ext cx="0" cy="0"/>
+          <a:chOff x="0" y="0"/>
+          <a:chExt cx="0" cy="0"/>
+        </a:xfrm>
+      </p:grpSpPr>
+      <p:sp>
+        <p:nvSpPr>
+          <p:cNvPr id="2" name="Slide Image Placeholder 1"/>
+          <p:cNvSpPr>
+            <a:spLocks noGrp="1" noRot="1" noChangeAspect="1"/>
+          </p:cNvSpPr>
+          <p:nvPr>
+            <p:ph type="sldImg"/>
+          </p:nvPr>
+        </p:nvSpPr>
+        <p:spPr/>
+      </p:sp>
+      <p:sp>
+        <p:nvSpPr>
+          <p:cNvPr id="3" name="Notes Placeholder 2"/>
+          <p:cNvSpPr>
+            <a:spLocks noGrp="1"/>
+          </p:cNvSpPr>
+          <p:nvPr>
+            <p:ph type="body" idx="1"/>
+          </p:nvPr>
+        </p:nvSpPr>
+        <p:spPr/>
+        <p:txBody>
+          <a:bodyPr/>
+          <a:lstStyle/>
+          <a:p>
+            <a:r>
+              <a:rPr lang="en-US" dirty="0"/>
+              <a:t/>
+            </a:r>
+            <a:endParaRPr lang="en-US" dirty="0"/>
+          </a:p>
+        </p:txBody>
+      </p:sp>
+      <p:sp>
+        <p:nvSpPr>
+          <p:cNvPr id="4" name="Slide Number Placeholder 3"/>
+          <p:cNvSpPr>
+            <a:spLocks noGrp="1"/>
+          </p:cNvSpPr>
+          <p:nvPr>
+            <p:ph type="sldNum" sz="quarter" idx="10"/>
+          </p:nvPr>
+        </p:nvSpPr>
+        <p:spPr/>
+        <p:txBody>
+          <a:bodyPr/>
+          <a:lstStyle/>
+          <a:p>
+            <a:fld id="{F7021451-1387-4CA6-816F-3879F97B5CBC}" type="slidenum">
+              <a:rPr lang="en-US"/>
+              <a:t>11</a:t>
             </a:fld>
             <a:endParaRPr lang="en-US"/>
           </a:p>
@@ -2002,6 +2091,824 @@
         </p:nvSpPr>
         <p:spPr>
           <a:xfrm>
+            <a:off x="7315200" y="-457200"/>
+            <a:ext cx="2286000" cy="2286000"/>
+          </a:xfrm>
+          <a:prstGeom prst="ellipse">
+            <a:avLst/>
+          </a:prstGeom>
+          <a:solidFill>
+            <a:srgbClr val="86C7A3">
+              <a:alpha val="8000"/>
+            </a:srgbClr>
+          </a:solidFill>
+          <a:ln/>
+        </p:spPr>
+      </p:sp>
+      <p:sp>
+        <p:nvSpPr>
+          <p:cNvPr id="3" name="Text 1"/>
+          <p:cNvSpPr/>
+          <p:nvPr/>
+        </p:nvSpPr>
+        <p:spPr>
+          <a:xfrm>
+            <a:off x="640080" y="365760"/>
+            <a:ext cx="1828800" cy="320040"/>
+          </a:xfrm>
+          <a:prstGeom prst="rect">
+            <a:avLst/>
+          </a:prstGeom>
+          <a:noFill/>
+          <a:ln/>
+        </p:spPr>
+        <p:txBody>
+          <a:bodyPr wrap="square" rtlCol="0" anchor="ctr"/>
+          <a:lstStyle/>
+          <a:p>
+            <a:pPr indent="0" marL="0">
+              <a:buNone/>
+            </a:pPr>
+            <a:r>
+              <a:rPr lang="en-US" sz="1000" b="1" dirty="0">
+                <a:solidFill>
+                  <a:srgbClr val="F6A623"/>
+                </a:solidFill>
+              </a:rPr>
+              <a:t>实践成果</a:t>
+            </a:r>
+            <a:endParaRPr lang="en-US" sz="1000" dirty="0"/>
+          </a:p>
+        </p:txBody>
+      </p:sp>
+      <p:sp>
+        <p:nvSpPr>
+          <p:cNvPr id="4" name="Text 2"/>
+          <p:cNvSpPr/>
+          <p:nvPr/>
+        </p:nvSpPr>
+        <p:spPr>
+          <a:xfrm>
+            <a:off x="640080" y="685800"/>
+            <a:ext cx="7315200" cy="502920"/>
+          </a:xfrm>
+          <a:prstGeom prst="rect">
+            <a:avLst/>
+          </a:prstGeom>
+          <a:noFill/>
+          <a:ln/>
+        </p:spPr>
+        <p:txBody>
+          <a:bodyPr wrap="square" lIns="0" tIns="0" rIns="0" bIns="0" rtlCol="0" anchor="ctr"/>
+          <a:lstStyle/>
+          <a:p>
+            <a:pPr indent="0" marL="0">
+              <a:buNone/>
+            </a:pPr>
+            <a:r>
+              <a:rPr lang="en-US" sz="2800" b="1" dirty="0">
+                <a:solidFill>
+                  <a:srgbClr val="3D2E1F"/>
+                </a:solidFill>
+                <a:latin typeface="Noto Serif SC" pitchFamily="34" charset="0"/>
+                <a:ea typeface="Noto Serif SC" pitchFamily="34" charset="-122"/>
+                <a:cs typeface="Noto Serif SC" pitchFamily="34" charset="-120"/>
+              </a:rPr>
+              <a:t>连续 7 天实践，效果显著</a:t>
+            </a:r>
+            <a:endParaRPr lang="en-US" sz="2800" dirty="0"/>
+          </a:p>
+        </p:txBody>
+      </p:sp>
+      <p:sp>
+        <p:nvSpPr>
+          <p:cNvPr id="5" name="Text 3"/>
+          <p:cNvSpPr/>
+          <p:nvPr/>
+        </p:nvSpPr>
+        <p:spPr>
+          <a:xfrm>
+            <a:off x="640080" y="1188720"/>
+            <a:ext cx="7315200" cy="274320"/>
+          </a:xfrm>
+          <a:prstGeom prst="rect">
+            <a:avLst/>
+          </a:prstGeom>
+          <a:noFill/>
+          <a:ln/>
+        </p:spPr>
+        <p:txBody>
+          <a:bodyPr wrap="square" rtlCol="0" anchor="ctr"/>
+          <a:lstStyle/>
+          <a:p>
+            <a:pPr indent="0" marL="0">
+              <a:buNone/>
+            </a:pPr>
+            <a:r>
+              <a:rPr lang="en-US" sz="1200" dirty="0">
+                <a:solidFill>
+                  <a:srgbClr val="7A6B5D"/>
+                </a:solidFill>
+              </a:rPr>
+              <a:t>小组成员亲身实践数据</a:t>
+            </a:r>
+            <a:endParaRPr lang="en-US" sz="1200" dirty="0"/>
+          </a:p>
+        </p:txBody>
+      </p:sp>
+      <p:sp>
+        <p:nvSpPr>
+          <p:cNvPr id="6" name="Shape 4"/>
+          <p:cNvSpPr/>
+          <p:nvPr/>
+        </p:nvSpPr>
+        <p:spPr>
+          <a:xfrm>
+            <a:off x="640080" y="1645920"/>
+            <a:ext cx="2468880" cy="1645920"/>
+          </a:xfrm>
+          <a:prstGeom prst="roundRect">
+            <a:avLst>
+              <a:gd name="adj" fmla="val 8333"/>
+            </a:avLst>
+          </a:prstGeom>
+          <a:solidFill>
+            <a:srgbClr val="FFFFFF">
+              <a:alpha val="80000"/>
+            </a:srgbClr>
+          </a:solidFill>
+          <a:ln w="6350">
+            <a:solidFill>
+              <a:srgbClr val="E0D5C5"/>
+            </a:solidFill>
+            <a:prstDash val="solid"/>
+          </a:ln>
+          <a:effectLst>
+            <a:outerShdw sx="100000" sy="100000" kx="0" ky="0" algn="bl" rotWithShape="0" blurRad="76200" dist="25400" dir="8100000">
+              <a:srgbClr val="000000">
+                <a:alpha val="8000"/>
+              </a:srgbClr>
+            </a:outerShdw>
+          </a:effectLst>
+        </p:spPr>
+      </p:sp>
+      <p:sp>
+        <p:nvSpPr>
+          <p:cNvPr id="7" name="Text 5"/>
+          <p:cNvSpPr/>
+          <p:nvPr/>
+        </p:nvSpPr>
+        <p:spPr>
+          <a:xfrm>
+            <a:off x="640080" y="1737360"/>
+            <a:ext cx="2468880" cy="731520"/>
+          </a:xfrm>
+          <a:prstGeom prst="rect">
+            <a:avLst/>
+          </a:prstGeom>
+          <a:noFill/>
+          <a:ln/>
+        </p:spPr>
+        <p:txBody>
+          <a:bodyPr wrap="square" rtlCol="0" anchor="ctr"/>
+          <a:lstStyle/>
+          <a:p>
+            <a:pPr algn="ctr" indent="0" marL="0">
+              <a:buNone/>
+            </a:pPr>
+            <a:r>
+              <a:rPr lang="en-US" sz="4000" b="1" dirty="0">
+                <a:solidFill>
+                  <a:srgbClr val="86C7A3"/>
+                </a:solidFill>
+                <a:latin typeface="Noto Serif SC" pitchFamily="34" charset="0"/>
+                <a:ea typeface="Noto Serif SC" pitchFamily="34" charset="-122"/>
+                <a:cs typeface="Noto Serif SC" pitchFamily="34" charset="-120"/>
+              </a:rPr>
+              <a:t>65%</a:t>
+            </a:r>
+            <a:endParaRPr lang="en-US" sz="4000" dirty="0"/>
+          </a:p>
+        </p:txBody>
+      </p:sp>
+      <p:sp>
+        <p:nvSpPr>
+          <p:cNvPr id="8" name="Text 6"/>
+          <p:cNvSpPr/>
+          <p:nvPr/>
+        </p:nvSpPr>
+        <p:spPr>
+          <a:xfrm>
+            <a:off x="640080" y="2468880"/>
+            <a:ext cx="2468880" cy="320040"/>
+          </a:xfrm>
+          <a:prstGeom prst="rect">
+            <a:avLst/>
+          </a:prstGeom>
+          <a:noFill/>
+          <a:ln/>
+        </p:spPr>
+        <p:txBody>
+          <a:bodyPr wrap="square" rtlCol="0" anchor="ctr"/>
+          <a:lstStyle/>
+          <a:p>
+            <a:pPr algn="ctr" indent="0" marL="0">
+              <a:buNone/>
+            </a:pPr>
+            <a:r>
+              <a:rPr lang="en-US" sz="1300" b="1" dirty="0">
+                <a:solidFill>
+                  <a:srgbClr val="3D2E1F"/>
+                </a:solidFill>
+                <a:latin typeface="Noto Serif SC" pitchFamily="34" charset="0"/>
+                <a:ea typeface="Noto Serif SC" pitchFamily="34" charset="-122"/>
+                <a:cs typeface="Noto Serif SC" pitchFamily="34" charset="-120"/>
+              </a:rPr>
+              <a:t>内耗频率下降</a:t>
+            </a:r>
+            <a:endParaRPr lang="en-US" sz="1300" dirty="0"/>
+          </a:p>
+        </p:txBody>
+      </p:sp>
+      <p:sp>
+        <p:nvSpPr>
+          <p:cNvPr id="9" name="Text 7"/>
+          <p:cNvSpPr/>
+          <p:nvPr/>
+        </p:nvSpPr>
+        <p:spPr>
+          <a:xfrm>
+            <a:off x="640080" y="2788920"/>
+            <a:ext cx="2468880" cy="457200"/>
+          </a:xfrm>
+          <a:prstGeom prst="rect">
+            <a:avLst/>
+          </a:prstGeom>
+          <a:noFill/>
+          <a:ln/>
+        </p:spPr>
+        <p:txBody>
+          <a:bodyPr wrap="square" rtlCol="0" anchor="ctr"/>
+          <a:lstStyle/>
+          <a:p>
+            <a:pPr algn="ctr" indent="0" marL="0">
+              <a:lnSpc>
+                <a:spcPct val="140000"/>
+              </a:lnSpc>
+              <a:buNone/>
+            </a:pPr>
+            <a:r>
+              <a:rPr lang="en-US" sz="1000" dirty="0">
+                <a:solidFill>
+                  <a:srgbClr val="7A6B5D"/>
+                </a:solidFill>
+              </a:rPr>
+              <a:t>从每天多次内耗</a:t>
+            </a:r>
+            <a:endParaRPr lang="en-US" sz="1000" dirty="0"/>
+          </a:p>
+          <a:p>
+            <a:pPr algn="ctr" indent="0" marL="0">
+              <a:lnSpc>
+                <a:spcPct val="140000"/>
+              </a:lnSpc>
+              <a:buNone/>
+            </a:pPr>
+            <a:r>
+              <a:rPr lang="en-US" sz="1000" dirty="0">
+                <a:solidFill>
+                  <a:srgbClr val="7A6B5D"/>
+                </a:solidFill>
+              </a:rPr>
+              <a:t>减少到偶尔发生</a:t>
+            </a:r>
+            <a:endParaRPr lang="en-US" sz="1000" dirty="0"/>
+          </a:p>
+        </p:txBody>
+      </p:sp>
+      <p:sp>
+        <p:nvSpPr>
+          <p:cNvPr id="10" name="Shape 8"/>
+          <p:cNvSpPr/>
+          <p:nvPr/>
+        </p:nvSpPr>
+        <p:spPr>
+          <a:xfrm>
+            <a:off x="3291840" y="1645920"/>
+            <a:ext cx="2468880" cy="1645920"/>
+          </a:xfrm>
+          <a:prstGeom prst="roundRect">
+            <a:avLst>
+              <a:gd name="adj" fmla="val 8333"/>
+            </a:avLst>
+          </a:prstGeom>
+          <a:solidFill>
+            <a:srgbClr val="FFFFFF">
+              <a:alpha val="80000"/>
+            </a:srgbClr>
+          </a:solidFill>
+          <a:ln w="6350">
+            <a:solidFill>
+              <a:srgbClr val="E0D5C5"/>
+            </a:solidFill>
+            <a:prstDash val="solid"/>
+          </a:ln>
+          <a:effectLst>
+            <a:outerShdw sx="100000" sy="100000" kx="0" ky="0" algn="bl" rotWithShape="0" blurRad="76200" dist="25400" dir="8100000">
+              <a:srgbClr val="000000">
+                <a:alpha val="8000"/>
+              </a:srgbClr>
+            </a:outerShdw>
+          </a:effectLst>
+        </p:spPr>
+      </p:sp>
+      <p:sp>
+        <p:nvSpPr>
+          <p:cNvPr id="11" name="Text 9"/>
+          <p:cNvSpPr/>
+          <p:nvPr/>
+        </p:nvSpPr>
+        <p:spPr>
+          <a:xfrm>
+            <a:off x="3291840" y="1737360"/>
+            <a:ext cx="2468880" cy="731520"/>
+          </a:xfrm>
+          <a:prstGeom prst="rect">
+            <a:avLst/>
+          </a:prstGeom>
+          <a:noFill/>
+          <a:ln/>
+        </p:spPr>
+        <p:txBody>
+          <a:bodyPr wrap="square" rtlCol="0" anchor="ctr"/>
+          <a:lstStyle/>
+          <a:p>
+            <a:pPr algn="ctr" indent="0" marL="0">
+              <a:buNone/>
+            </a:pPr>
+            <a:r>
+              <a:rPr lang="en-US" sz="4000" b="1" dirty="0">
+                <a:solidFill>
+                  <a:srgbClr val="F6A623"/>
+                </a:solidFill>
+                <a:latin typeface="Noto Serif SC" pitchFamily="34" charset="0"/>
+                <a:ea typeface="Noto Serif SC" pitchFamily="34" charset="-122"/>
+                <a:cs typeface="Noto Serif SC" pitchFamily="34" charset="-120"/>
+              </a:rPr>
+              <a:t>↑</a:t>
+            </a:r>
+            <a:endParaRPr lang="en-US" sz="4000" dirty="0"/>
+          </a:p>
+        </p:txBody>
+      </p:sp>
+      <p:sp>
+        <p:nvSpPr>
+          <p:cNvPr id="12" name="Text 10"/>
+          <p:cNvSpPr/>
+          <p:nvPr/>
+        </p:nvSpPr>
+        <p:spPr>
+          <a:xfrm>
+            <a:off x="3291840" y="2468880"/>
+            <a:ext cx="2468880" cy="320040"/>
+          </a:xfrm>
+          <a:prstGeom prst="rect">
+            <a:avLst/>
+          </a:prstGeom>
+          <a:noFill/>
+          <a:ln/>
+        </p:spPr>
+        <p:txBody>
+          <a:bodyPr wrap="square" rtlCol="0" anchor="ctr"/>
+          <a:lstStyle/>
+          <a:p>
+            <a:pPr algn="ctr" indent="0" marL="0">
+              <a:buNone/>
+            </a:pPr>
+            <a:r>
+              <a:rPr lang="en-US" sz="1300" b="1" dirty="0">
+                <a:solidFill>
+                  <a:srgbClr val="3D2E1F"/>
+                </a:solidFill>
+                <a:latin typeface="Noto Serif SC" pitchFamily="34" charset="0"/>
+                <a:ea typeface="Noto Serif SC" pitchFamily="34" charset="-122"/>
+                <a:cs typeface="Noto Serif SC" pitchFamily="34" charset="-120"/>
+              </a:rPr>
+              <a:t>任务启动速度提升</a:t>
+            </a:r>
+            <a:endParaRPr lang="en-US" sz="1300" dirty="0"/>
+          </a:p>
+        </p:txBody>
+      </p:sp>
+      <p:sp>
+        <p:nvSpPr>
+          <p:cNvPr id="13" name="Text 11"/>
+          <p:cNvSpPr/>
+          <p:nvPr/>
+        </p:nvSpPr>
+        <p:spPr>
+          <a:xfrm>
+            <a:off x="3291840" y="2788920"/>
+            <a:ext cx="2468880" cy="457200"/>
+          </a:xfrm>
+          <a:prstGeom prst="rect">
+            <a:avLst/>
+          </a:prstGeom>
+          <a:noFill/>
+          <a:ln/>
+        </p:spPr>
+        <p:txBody>
+          <a:bodyPr wrap="square" rtlCol="0" anchor="ctr"/>
+          <a:lstStyle/>
+          <a:p>
+            <a:pPr algn="ctr" indent="0" marL="0">
+              <a:lnSpc>
+                <a:spcPct val="140000"/>
+              </a:lnSpc>
+              <a:buNone/>
+            </a:pPr>
+            <a:r>
+              <a:rPr lang="en-US" sz="1000" dirty="0">
+                <a:solidFill>
+                  <a:srgbClr val="7A6B5D"/>
+                </a:solidFill>
+              </a:rPr>
+              <a:t>拖延时间明显缩短</a:t>
+            </a:r>
+            <a:endParaRPr lang="en-US" sz="1000" dirty="0"/>
+          </a:p>
+          <a:p>
+            <a:pPr algn="ctr" indent="0" marL="0">
+              <a:lnSpc>
+                <a:spcPct val="140000"/>
+              </a:lnSpc>
+              <a:buNone/>
+            </a:pPr>
+            <a:r>
+              <a:rPr lang="en-US" sz="1000" dirty="0">
+                <a:solidFill>
+                  <a:srgbClr val="7A6B5D"/>
+                </a:solidFill>
+              </a:rPr>
+              <a:t>行动力增强</a:t>
+            </a:r>
+            <a:endParaRPr lang="en-US" sz="1000" dirty="0"/>
+          </a:p>
+        </p:txBody>
+      </p:sp>
+      <p:sp>
+        <p:nvSpPr>
+          <p:cNvPr id="14" name="Shape 12"/>
+          <p:cNvSpPr/>
+          <p:nvPr/>
+        </p:nvSpPr>
+        <p:spPr>
+          <a:xfrm>
+            <a:off x="5943600" y="1645920"/>
+            <a:ext cx="2468880" cy="1645920"/>
+          </a:xfrm>
+          <a:prstGeom prst="roundRect">
+            <a:avLst>
+              <a:gd name="adj" fmla="val 8333"/>
+            </a:avLst>
+          </a:prstGeom>
+          <a:solidFill>
+            <a:srgbClr val="FFFFFF">
+              <a:alpha val="80000"/>
+            </a:srgbClr>
+          </a:solidFill>
+          <a:ln w="6350">
+            <a:solidFill>
+              <a:srgbClr val="E0D5C5"/>
+            </a:solidFill>
+            <a:prstDash val="solid"/>
+          </a:ln>
+          <a:effectLst>
+            <a:outerShdw sx="100000" sy="100000" kx="0" ky="0" algn="bl" rotWithShape="0" blurRad="76200" dist="25400" dir="8100000">
+              <a:srgbClr val="000000">
+                <a:alpha val="8000"/>
+              </a:srgbClr>
+            </a:outerShdw>
+          </a:effectLst>
+        </p:spPr>
+      </p:sp>
+      <p:sp>
+        <p:nvSpPr>
+          <p:cNvPr id="15" name="Text 13"/>
+          <p:cNvSpPr/>
+          <p:nvPr/>
+        </p:nvSpPr>
+        <p:spPr>
+          <a:xfrm>
+            <a:off x="5943600" y="1737360"/>
+            <a:ext cx="2468880" cy="731520"/>
+          </a:xfrm>
+          <a:prstGeom prst="rect">
+            <a:avLst/>
+          </a:prstGeom>
+          <a:noFill/>
+          <a:ln/>
+        </p:spPr>
+        <p:txBody>
+          <a:bodyPr wrap="square" rtlCol="0" anchor="ctr"/>
+          <a:lstStyle/>
+          <a:p>
+            <a:pPr algn="ctr" indent="0" marL="0">
+              <a:buNone/>
+            </a:pPr>
+            <a:r>
+              <a:rPr lang="en-US" sz="4000" b="1" dirty="0">
+                <a:solidFill>
+                  <a:srgbClr val="A78BFA"/>
+                </a:solidFill>
+                <a:latin typeface="Noto Serif SC" pitchFamily="34" charset="0"/>
+                <a:ea typeface="Noto Serif SC" pitchFamily="34" charset="-122"/>
+                <a:cs typeface="Noto Serif SC" pitchFamily="34" charset="-120"/>
+              </a:rPr>
+              <a:t>↓</a:t>
+            </a:r>
+            <a:endParaRPr lang="en-US" sz="4000" dirty="0"/>
+          </a:p>
+        </p:txBody>
+      </p:sp>
+      <p:sp>
+        <p:nvSpPr>
+          <p:cNvPr id="16" name="Text 14"/>
+          <p:cNvSpPr/>
+          <p:nvPr/>
+        </p:nvSpPr>
+        <p:spPr>
+          <a:xfrm>
+            <a:off x="5943600" y="2468880"/>
+            <a:ext cx="2468880" cy="320040"/>
+          </a:xfrm>
+          <a:prstGeom prst="rect">
+            <a:avLst/>
+          </a:prstGeom>
+          <a:noFill/>
+          <a:ln/>
+        </p:spPr>
+        <p:txBody>
+          <a:bodyPr wrap="square" rtlCol="0" anchor="ctr"/>
+          <a:lstStyle/>
+          <a:p>
+            <a:pPr algn="ctr" indent="0" marL="0">
+              <a:buNone/>
+            </a:pPr>
+            <a:r>
+              <a:rPr lang="en-US" sz="1300" b="1" dirty="0">
+                <a:solidFill>
+                  <a:srgbClr val="3D2E1F"/>
+                </a:solidFill>
+                <a:latin typeface="Noto Serif SC" pitchFamily="34" charset="0"/>
+                <a:ea typeface="Noto Serif SC" pitchFamily="34" charset="-122"/>
+                <a:cs typeface="Noto Serif SC" pitchFamily="34" charset="-120"/>
+              </a:rPr>
+              <a:t>焦虑自评分数降低</a:t>
+            </a:r>
+            <a:endParaRPr lang="en-US" sz="1300" dirty="0"/>
+          </a:p>
+        </p:txBody>
+      </p:sp>
+      <p:sp>
+        <p:nvSpPr>
+          <p:cNvPr id="17" name="Text 15"/>
+          <p:cNvSpPr/>
+          <p:nvPr/>
+        </p:nvSpPr>
+        <p:spPr>
+          <a:xfrm>
+            <a:off x="5943600" y="2788920"/>
+            <a:ext cx="2468880" cy="457200"/>
+          </a:xfrm>
+          <a:prstGeom prst="rect">
+            <a:avLst/>
+          </a:prstGeom>
+          <a:noFill/>
+          <a:ln/>
+        </p:spPr>
+        <p:txBody>
+          <a:bodyPr wrap="square" rtlCol="0" anchor="ctr"/>
+          <a:lstStyle/>
+          <a:p>
+            <a:pPr algn="ctr" indent="0" marL="0">
+              <a:lnSpc>
+                <a:spcPct val="140000"/>
+              </a:lnSpc>
+              <a:buNone/>
+            </a:pPr>
+            <a:r>
+              <a:rPr lang="en-US" sz="1000" dirty="0">
+                <a:solidFill>
+                  <a:srgbClr val="7A6B5D"/>
+                </a:solidFill>
+              </a:rPr>
+              <a:t>自我报告焦虑水平</a:t>
+            </a:r>
+            <a:endParaRPr lang="en-US" sz="1000" dirty="0"/>
+          </a:p>
+          <a:p>
+            <a:pPr algn="ctr" indent="0" marL="0">
+              <a:lnSpc>
+                <a:spcPct val="140000"/>
+              </a:lnSpc>
+              <a:buNone/>
+            </a:pPr>
+            <a:r>
+              <a:rPr lang="en-US" sz="1000" dirty="0">
+                <a:solidFill>
+                  <a:srgbClr val="7A6B5D"/>
+                </a:solidFill>
+              </a:rPr>
+              <a:t>持续下降</a:t>
+            </a:r>
+            <a:endParaRPr lang="en-US" sz="1000" dirty="0"/>
+          </a:p>
+        </p:txBody>
+      </p:sp>
+      <p:sp>
+        <p:nvSpPr>
+          <p:cNvPr id="18" name="Shape 16"/>
+          <p:cNvSpPr/>
+          <p:nvPr/>
+        </p:nvSpPr>
+        <p:spPr>
+          <a:xfrm>
+            <a:off x="640080" y="3566160"/>
+            <a:ext cx="7863840" cy="1097280"/>
+          </a:xfrm>
+          <a:prstGeom prst="roundRect">
+            <a:avLst>
+              <a:gd name="adj" fmla="val 10000"/>
+            </a:avLst>
+          </a:prstGeom>
+          <a:solidFill>
+            <a:srgbClr val="FEF3C7">
+              <a:alpha val="50000"/>
+            </a:srgbClr>
+          </a:solidFill>
+          <a:ln w="6350">
+            <a:solidFill>
+              <a:srgbClr val="FDE68A"/>
+            </a:solidFill>
+            <a:prstDash val="solid"/>
+          </a:ln>
+        </p:spPr>
+      </p:sp>
+      <p:sp>
+        <p:nvSpPr>
+          <p:cNvPr id="19" name="Text 17"/>
+          <p:cNvSpPr/>
+          <p:nvPr/>
+        </p:nvSpPr>
+        <p:spPr>
+          <a:xfrm>
+            <a:off x="822960" y="3611880"/>
+            <a:ext cx="457200" cy="457200"/>
+          </a:xfrm>
+          <a:prstGeom prst="rect">
+            <a:avLst/>
+          </a:prstGeom>
+          <a:noFill/>
+          <a:ln/>
+        </p:spPr>
+        <p:txBody>
+          <a:bodyPr wrap="square" rtlCol="0" anchor="ctr"/>
+          <a:lstStyle/>
+          <a:p>
+            <a:pPr indent="0" marL="0">
+              <a:buNone/>
+            </a:pPr>
+            <a:r>
+              <a:rPr lang="en-US" sz="3600" dirty="0">
+                <a:solidFill>
+                  <a:srgbClr val="F6A623"/>
+                </a:solidFill>
+                <a:latin typeface="Noto Serif SC" pitchFamily="34" charset="0"/>
+                <a:ea typeface="Noto Serif SC" pitchFamily="34" charset="-122"/>
+                <a:cs typeface="Noto Serif SC" pitchFamily="34" charset="-120"/>
+              </a:rPr>
+              <a:t>"</a:t>
+            </a:r>
+            <a:endParaRPr lang="en-US" sz="3600" dirty="0"/>
+          </a:p>
+        </p:txBody>
+      </p:sp>
+      <p:sp>
+        <p:nvSpPr>
+          <p:cNvPr id="20" name="Text 18"/>
+          <p:cNvSpPr/>
+          <p:nvPr/>
+        </p:nvSpPr>
+        <p:spPr>
+          <a:xfrm>
+            <a:off x="1280160" y="3749040"/>
+            <a:ext cx="6858000" cy="365760"/>
+          </a:xfrm>
+          <a:prstGeom prst="rect">
+            <a:avLst/>
+          </a:prstGeom>
+          <a:noFill/>
+          <a:ln/>
+        </p:spPr>
+        <p:txBody>
+          <a:bodyPr wrap="square" rtlCol="0" anchor="ctr"/>
+          <a:lstStyle/>
+          <a:p>
+            <a:pPr indent="0" marL="0">
+              <a:buNone/>
+            </a:pPr>
+            <a:r>
+              <a:rPr lang="en-US" sz="1300" dirty="0">
+                <a:solidFill>
+                  <a:srgbClr val="3D2E1F"/>
+                </a:solidFill>
+                <a:latin typeface="Noto Serif SC" pitchFamily="34" charset="0"/>
+                <a:ea typeface="Noto Serif SC" pitchFamily="34" charset="-122"/>
+                <a:cs typeface="Noto Serif SC" pitchFamily="34" charset="-120"/>
+              </a:rPr>
+              <a:t>做完 5 步疗愈流程后，我发现自己「来不及了」的想法变少了，开始做事变得更果断了。</a:t>
+            </a:r>
+            <a:endParaRPr lang="en-US" sz="1300" dirty="0"/>
+          </a:p>
+        </p:txBody>
+      </p:sp>
+      <p:sp>
+        <p:nvSpPr>
+          <p:cNvPr id="21" name="Text 19"/>
+          <p:cNvSpPr/>
+          <p:nvPr/>
+        </p:nvSpPr>
+        <p:spPr>
+          <a:xfrm>
+            <a:off x="1280160" y="4160520"/>
+            <a:ext cx="2743200" cy="274320"/>
+          </a:xfrm>
+          <a:prstGeom prst="rect">
+            <a:avLst/>
+          </a:prstGeom>
+          <a:noFill/>
+          <a:ln/>
+        </p:spPr>
+        <p:txBody>
+          <a:bodyPr wrap="square" rtlCol="0" anchor="ctr"/>
+          <a:lstStyle/>
+          <a:p>
+            <a:pPr indent="0" marL="0">
+              <a:buNone/>
+            </a:pPr>
+            <a:r>
+              <a:rPr lang="en-US" sz="1000" dirty="0">
+                <a:solidFill>
+                  <a:srgbClr val="B8A99A"/>
+                </a:solidFill>
+              </a:rPr>
+              <a:t>—— 实践参与者反馈</a:t>
+            </a:r>
+            <a:endParaRPr lang="en-US" sz="1000" dirty="0"/>
+          </a:p>
+        </p:txBody>
+      </p:sp>
+    </p:spTree>
+  </p:cSld>
+  <p:clrMapOvr>
+    <a:masterClrMapping/>
+  </p:clrMapOvr>
+</p:sld>
+</file>
+
+<file path=ppt/slides/slide11.xml><?xml version="1.0" encoding="utf-8"?>
+<p:sld xmlns:a="http://schemas.openxmlformats.org/drawingml/2006/main" xmlns:r="http://schemas.openxmlformats.org/officeDocument/2006/relationships" xmlns:p="http://schemas.openxmlformats.org/presentationml/2006/main">
+  <p:cSld name="Slide 11">
+    <p:bg>
+      <p:bgPr>
+        <a:solidFill>
+          <a:srgbClr val="FDF8F0"/>
+        </a:solidFill>
+      </p:bgPr>
+    </p:bg>
+    <p:spTree>
+      <p:nvGrpSpPr>
+        <p:cNvPr id="1" name=""/>
+        <p:cNvGrpSpPr/>
+        <p:nvPr/>
+      </p:nvGrpSpPr>
+      <p:grpSpPr>
+        <a:xfrm>
+          <a:off x="0" y="0"/>
+          <a:ext cx="0" cy="0"/>
+          <a:chOff x="0" y="0"/>
+          <a:chExt cx="0" cy="0"/>
+        </a:xfrm>
+      </p:grpSpPr>
+      <p:sp>
+        <p:nvSpPr>
+          <p:cNvPr id="2" name="Shape 0"/>
+          <p:cNvSpPr/>
+          <p:nvPr/>
+        </p:nvSpPr>
+        <p:spPr>
+          <a:xfrm>
             <a:off x="5486400" y="-1371600"/>
             <a:ext cx="4572000" cy="4572000"/>
           </a:xfrm>
@@ -4308,7 +5215,7 @@
                 <a:ea typeface="Noto Serif SC" pitchFamily="34" charset="-122"/>
                 <a:cs typeface="Noto Serif SC" pitchFamily="34" charset="-120"/>
               </a:rPr>
-              <a:t>10</a:t>
+              <a:t>14</a:t>
             </a:r>
             <a:endParaRPr lang="en-US" sz="2800" dirty="0"/>
           </a:p>
@@ -4620,7 +5527,7 @@
                 <a:ea typeface="Noto Serif SC" pitchFamily="34" charset="-122"/>
                 <a:cs typeface="Noto Serif SC" pitchFamily="34" charset="-120"/>
               </a:rPr>
-              <a:t>24h</a:t>
+              <a:t>11</a:t>
             </a:r>
             <a:endParaRPr lang="en-US" sz="2800" dirty="0"/>
           </a:p>
@@ -4656,7 +5563,7 @@
                   <a:srgbClr val="B8A99A"/>
                 </a:solidFill>
               </a:rPr>
-              <a:t>随时可用</a:t>
+              <a:t>功能模块</a:t>
             </a:r>
             <a:endParaRPr lang="en-US" sz="1000" dirty="0"/>
           </a:p>
@@ -6573,7 +7480,7 @@
                   <a:srgbClr val="7A6B5D"/>
                 </a:solidFill>
               </a:rPr>
-              <a:t>正念呼吸、心理测评、感恩日记、情绪记录——全方位心理健康守护</a:t>
+              <a:t>正念呼吸、心理测评、感恩日记、情绪记录、沉浸互动、冥想、涂鸦、日历</a:t>
             </a:r>
             <a:endParaRPr lang="en-US" sz="1200" dirty="0"/>
           </a:p>
@@ -7197,7 +8104,7 @@
                   <a:srgbClr val="000000"/>
                 </a:solidFill>
               </a:rPr>
-              <a:t>🎨</a:t>
+              <a:t>📅</a:t>
             </a:r>
             <a:endParaRPr lang="en-US" sz="3600" dirty="0"/>
           </a:p>
@@ -7236,7 +8143,7 @@
                 <a:ea typeface="Noto Serif SC" pitchFamily="34" charset="-122"/>
                 <a:cs typeface="Noto Serif SC" pitchFamily="34" charset="-120"/>
               </a:rPr>
-              <a:t>情绪卡片</a:t>
+              <a:t>情绪日历</a:t>
             </a:r>
             <a:endParaRPr lang="en-US" sz="1400" dirty="0"/>
           </a:p>
@@ -7275,7 +8182,7 @@
                   <a:srgbClr val="7A6B5D"/>
                 </a:solidFill>
               </a:rPr>
-              <a:t>Canvas 精美渲染</a:t>
+              <a:t>日历可视化记录</a:t>
             </a:r>
             <a:endParaRPr lang="en-US" sz="1000" dirty="0"/>
           </a:p>
@@ -7292,7 +8199,7 @@
                   <a:srgbClr val="7A6B5D"/>
                 </a:solidFill>
               </a:rPr>
-              <a:t>记录完整疗愈旅程</a:t>
+              <a:t>连续打卡激励</a:t>
             </a:r>
             <a:endParaRPr lang="en-US" sz="1000" dirty="0"/>
           </a:p>
@@ -7309,7 +8216,7 @@
                   <a:srgbClr val="7A6B5D"/>
                 </a:solidFill>
               </a:rPr>
-              <a:t>可保存为图片分享</a:t>
+              <a:t>8个成就徽章</a:t>
             </a:r>
             <a:endParaRPr lang="en-US" sz="1000" dirty="0"/>
           </a:p>
@@ -7355,14 +8262,14 @@
         </p:nvSpPr>
         <p:spPr>
           <a:xfrm>
-            <a:off x="6400800" y="2743200"/>
-            <a:ext cx="3200400" cy="3200400"/>
+            <a:off x="-274320" y="2743200"/>
+            <a:ext cx="2286000" cy="2286000"/>
           </a:xfrm>
           <a:prstGeom prst="ellipse">
             <a:avLst/>
           </a:prstGeom>
           <a:solidFill>
-            <a:srgbClr val="A78BFA">
+            <a:srgbClr val="7DD3FC">
               <a:alpha val="8000"/>
             </a:srgbClr>
           </a:solidFill>
@@ -7399,7 +8306,7 @@
                   <a:srgbClr val="F6A623"/>
                 </a:solidFill>
               </a:rPr>
-              <a:t>理论依据</a:t>
+              <a:t>核心功能四</a:t>
             </a:r>
             <a:endParaRPr lang="en-US" sz="1000" dirty="0"/>
           </a:p>
@@ -7438,7 +8345,7 @@
                 <a:ea typeface="Noto Serif SC" pitchFamily="34" charset="-122"/>
                 <a:cs typeface="Noto Serif SC" pitchFamily="34" charset="-120"/>
               </a:rPr>
-              <a:t>循证心理学基础</a:t>
+              <a:t>数字媒体艺术疗愈</a:t>
             </a:r>
             <a:endParaRPr lang="en-US" sz="2800" dirty="0"/>
           </a:p>
@@ -7474,7 +8381,7 @@
                   <a:srgbClr val="7A6B5D"/>
                 </a:solidFill>
               </a:rPr>
-              <a:t>每一项功能都有扎实的理论支撑</a:t>
+              <a:t>手势驱动粒子、AI冥想引导、情绪涂鸦——用艺术改善心情</a:t>
             </a:r>
             <a:endParaRPr lang="en-US" sz="1200" dirty="0"/>
           </a:p>
@@ -7489,7 +8396,7 @@
         <p:spPr>
           <a:xfrm>
             <a:off x="640080" y="1737360"/>
-            <a:ext cx="1874520" cy="2834640"/>
+            <a:ext cx="1874520" cy="2743200"/>
           </a:xfrm>
           <a:prstGeom prst="roundRect">
             <a:avLst>
@@ -7518,23 +8425,39 @@
       </p:sp>
       <p:sp>
         <p:nvSpPr>
-          <p:cNvPr id="7" name="Shape 5"/>
-          <p:cNvSpPr/>
-          <p:nvPr/>
-        </p:nvSpPr>
-        <p:spPr>
-          <a:xfrm>
-            <a:off x="1280160" y="1920240"/>
-            <a:ext cx="502920" cy="502920"/>
-          </a:xfrm>
-          <a:prstGeom prst="ellipse">
-            <a:avLst/>
-          </a:prstGeom>
-          <a:solidFill>
-            <a:srgbClr val="F6A623"/>
-          </a:solidFill>
-          <a:ln/>
-        </p:spPr>
+          <p:cNvPr id="7" name="Text 5"/>
+          <p:cNvSpPr/>
+          <p:nvPr/>
+        </p:nvSpPr>
+        <p:spPr>
+          <a:xfrm>
+            <a:off x="640080" y="1920240"/>
+            <a:ext cx="1874520" cy="640080"/>
+          </a:xfrm>
+          <a:prstGeom prst="rect">
+            <a:avLst/>
+          </a:prstGeom>
+          <a:noFill/>
+          <a:ln/>
+        </p:spPr>
+        <p:txBody>
+          <a:bodyPr wrap="square" rtlCol="0" anchor="ctr"/>
+          <a:lstStyle/>
+          <a:p>
+            <a:pPr algn="ctr" indent="0" marL="0">
+              <a:buNone/>
+            </a:pPr>
+            <a:r>
+              <a:rPr lang="en-US" sz="3600" dirty="0">
+                <a:solidFill>
+                  <a:srgbClr val="000000"/>
+                </a:solidFill>
+              </a:rPr>
+              <a:t>🌊</a:t>
+            </a:r>
+            <a:endParaRPr lang="en-US" sz="3600" dirty="0"/>
+          </a:p>
+        </p:txBody>
       </p:sp>
       <p:sp>
         <p:nvSpPr>
@@ -7544,34 +8467,34 @@
         </p:nvSpPr>
         <p:spPr>
           <a:xfrm>
-            <a:off x="1280160" y="1920240"/>
-            <a:ext cx="502920" cy="502920"/>
-          </a:xfrm>
-          <a:prstGeom prst="rect">
-            <a:avLst/>
-          </a:prstGeom>
-          <a:noFill/>
-          <a:ln/>
-        </p:spPr>
-        <p:txBody>
-          <a:bodyPr wrap="square" rtlCol="0" anchor="ctr"/>
-          <a:lstStyle/>
-          <a:p>
-            <a:pPr algn="ctr" indent="0" marL="0">
-              <a:buNone/>
-            </a:pPr>
-            <a:r>
-              <a:rPr lang="en-US" sz="1800" b="1" dirty="0">
-                <a:solidFill>
-                  <a:srgbClr val="FFFFFF"/>
+            <a:off x="640080" y="2606040"/>
+            <a:ext cx="1874520" cy="365760"/>
+          </a:xfrm>
+          <a:prstGeom prst="rect">
+            <a:avLst/>
+          </a:prstGeom>
+          <a:noFill/>
+          <a:ln/>
+        </p:spPr>
+        <p:txBody>
+          <a:bodyPr wrap="square" rtlCol="0" anchor="ctr"/>
+          <a:lstStyle/>
+          <a:p>
+            <a:pPr algn="ctr" indent="0" marL="0">
+              <a:buNone/>
+            </a:pPr>
+            <a:r>
+              <a:rPr lang="en-US" sz="1400" b="1" dirty="0">
+                <a:solidFill>
+                  <a:srgbClr val="3D2E1F"/>
                 </a:solidFill>
                 <a:latin typeface="Noto Serif SC" pitchFamily="34" charset="0"/>
                 <a:ea typeface="Noto Serif SC" pitchFamily="34" charset="-122"/>
                 <a:cs typeface="Noto Serif SC" pitchFamily="34" charset="-120"/>
               </a:rPr>
-              <a:t>1</a:t>
-            </a:r>
-            <a:endParaRPr lang="en-US" sz="1800" dirty="0"/>
+              <a:t>沉浸式互动</a:t>
+            </a:r>
+            <a:endParaRPr lang="en-US" sz="1400" dirty="0"/>
           </a:p>
         </p:txBody>
       </p:sp>
@@ -7583,47 +8506,8 @@
         </p:nvSpPr>
         <p:spPr>
           <a:xfrm>
-            <a:off x="777240" y="2560320"/>
-            <a:ext cx="1600200" cy="320040"/>
-          </a:xfrm>
-          <a:prstGeom prst="rect">
-            <a:avLst/>
-          </a:prstGeom>
-          <a:noFill/>
-          <a:ln/>
-        </p:spPr>
-        <p:txBody>
-          <a:bodyPr wrap="square" rtlCol="0" anchor="ctr"/>
-          <a:lstStyle/>
-          <a:p>
-            <a:pPr algn="ctr" indent="0" marL="0">
-              <a:buNone/>
-            </a:pPr>
-            <a:r>
-              <a:rPr lang="en-US" sz="1300" b="1" dirty="0">
-                <a:solidFill>
-                  <a:srgbClr val="3D2E1F"/>
-                </a:solidFill>
-                <a:latin typeface="Noto Serif SC" pitchFamily="34" charset="0"/>
-                <a:ea typeface="Noto Serif SC" pitchFamily="34" charset="-122"/>
-                <a:cs typeface="Noto Serif SC" pitchFamily="34" charset="-120"/>
-              </a:rPr>
-              <a:t>情绪ABC理论</a:t>
-            </a:r>
-            <a:endParaRPr lang="en-US" sz="1300" dirty="0"/>
-          </a:p>
-        </p:txBody>
-      </p:sp>
-      <p:sp>
-        <p:nvSpPr>
-          <p:cNvPr id="10" name="Text 8"/>
-          <p:cNvSpPr/>
-          <p:nvPr/>
-        </p:nvSpPr>
-        <p:spPr>
-          <a:xfrm>
-            <a:off x="777240" y="2926080"/>
-            <a:ext cx="1600200" cy="731520"/>
+            <a:off x="822960" y="3063240"/>
+            <a:ext cx="1508760" cy="1188720"/>
           </a:xfrm>
           <a:prstGeom prst="rect">
             <a:avLst/>
@@ -7647,7 +8531,7 @@
                   <a:srgbClr val="7A6B5D"/>
                 </a:solidFill>
               </a:rPr>
-              <a:t>事件A不直接导致情绪C</a:t>
+              <a:t>手势/触摸驱动 Perlin 噪声</a:t>
             </a:r>
             <a:endParaRPr lang="en-US" sz="1000" dirty="0"/>
           </a:p>
@@ -7664,43 +8548,24 @@
                   <a:srgbClr val="7A6B5D"/>
                 </a:solidFill>
               </a:rPr>
-              <a:t>不合理信念B才是内耗根源</a:t>
+              <a:t>流场粒子系统</a:t>
             </a:r>
             <a:endParaRPr lang="en-US" sz="1000" dirty="0"/>
           </a:p>
-        </p:txBody>
-      </p:sp>
-      <p:sp>
-        <p:nvSpPr>
-          <p:cNvPr id="11" name="Text 9"/>
-          <p:cNvSpPr/>
-          <p:nvPr/>
-        </p:nvSpPr>
-        <p:spPr>
-          <a:xfrm>
-            <a:off x="777240" y="3749040"/>
-            <a:ext cx="1600200" cy="274320"/>
-          </a:xfrm>
-          <a:prstGeom prst="rect">
-            <a:avLst/>
-          </a:prstGeom>
-          <a:noFill/>
-          <a:ln/>
-        </p:spPr>
-        <p:txBody>
-          <a:bodyPr wrap="square" rtlCol="0" anchor="ctr"/>
-          <a:lstStyle/>
-          <a:p>
-            <a:pPr algn="ctr" indent="0" marL="0">
-              <a:buNone/>
-            </a:pPr>
-            <a:r>
-              <a:rPr lang="en-US" sz="1000" b="1" dirty="0">
-                <a:solidFill>
-                  <a:srgbClr val="F6A623"/>
-                </a:solidFill>
-              </a:rPr>
-              <a:t>→ 识别不合理信念</a:t>
+          <a:p>
+            <a:pPr algn="ctr" indent="0" marL="0">
+              <a:lnSpc>
+                <a:spcPct val="150000"/>
+              </a:lnSpc>
+              <a:buNone/>
+            </a:pPr>
+            <a:r>
+              <a:rPr lang="en-US" sz="1000" dirty="0">
+                <a:solidFill>
+                  <a:srgbClr val="7A6B5D"/>
+                </a:solidFill>
+              </a:rPr>
+              <a:t>4种情绪色彩主题</a:t>
             </a:r>
             <a:endParaRPr lang="en-US" sz="1000" dirty="0"/>
           </a:p>
@@ -7708,14 +8573,14 @@
       </p:sp>
       <p:sp>
         <p:nvSpPr>
-          <p:cNvPr id="12" name="Shape 10"/>
+          <p:cNvPr id="10" name="Shape 8"/>
           <p:cNvSpPr/>
           <p:nvPr/>
         </p:nvSpPr>
         <p:spPr>
           <a:xfrm>
             <a:off x="2651760" y="1737360"/>
-            <a:ext cx="1874520" cy="2834640"/>
+            <a:ext cx="1874520" cy="2743200"/>
           </a:xfrm>
           <a:prstGeom prst="roundRect">
             <a:avLst>
@@ -7744,112 +8609,89 @@
       </p:sp>
       <p:sp>
         <p:nvSpPr>
-          <p:cNvPr id="13" name="Shape 11"/>
-          <p:cNvSpPr/>
-          <p:nvPr/>
-        </p:nvSpPr>
-        <p:spPr>
-          <a:xfrm>
-            <a:off x="3291840" y="1920240"/>
-            <a:ext cx="502920" cy="502920"/>
-          </a:xfrm>
-          <a:prstGeom prst="ellipse">
-            <a:avLst/>
-          </a:prstGeom>
-          <a:solidFill>
-            <a:srgbClr val="A78BFA"/>
-          </a:solidFill>
-          <a:ln/>
-        </p:spPr>
-      </p:sp>
-      <p:sp>
-        <p:nvSpPr>
-          <p:cNvPr id="14" name="Text 12"/>
-          <p:cNvSpPr/>
-          <p:nvPr/>
-        </p:nvSpPr>
-        <p:spPr>
-          <a:xfrm>
-            <a:off x="3291840" y="1920240"/>
-            <a:ext cx="502920" cy="502920"/>
-          </a:xfrm>
-          <a:prstGeom prst="rect">
-            <a:avLst/>
-          </a:prstGeom>
-          <a:noFill/>
-          <a:ln/>
-        </p:spPr>
-        <p:txBody>
-          <a:bodyPr wrap="square" rtlCol="0" anchor="ctr"/>
-          <a:lstStyle/>
-          <a:p>
-            <a:pPr algn="ctr" indent="0" marL="0">
-              <a:buNone/>
-            </a:pPr>
-            <a:r>
-              <a:rPr lang="en-US" sz="1800" b="1" dirty="0">
-                <a:solidFill>
-                  <a:srgbClr val="FFFFFF"/>
+          <p:cNvPr id="11" name="Text 9"/>
+          <p:cNvSpPr/>
+          <p:nvPr/>
+        </p:nvSpPr>
+        <p:spPr>
+          <a:xfrm>
+            <a:off x="2651760" y="1920240"/>
+            <a:ext cx="1874520" cy="640080"/>
+          </a:xfrm>
+          <a:prstGeom prst="rect">
+            <a:avLst/>
+          </a:prstGeom>
+          <a:noFill/>
+          <a:ln/>
+        </p:spPr>
+        <p:txBody>
+          <a:bodyPr wrap="square" rtlCol="0" anchor="ctr"/>
+          <a:lstStyle/>
+          <a:p>
+            <a:pPr algn="ctr" indent="0" marL="0">
+              <a:buNone/>
+            </a:pPr>
+            <a:r>
+              <a:rPr lang="en-US" sz="3600" dirty="0">
+                <a:solidFill>
+                  <a:srgbClr val="000000"/>
+                </a:solidFill>
+              </a:rPr>
+              <a:t>🧘</a:t>
+            </a:r>
+            <a:endParaRPr lang="en-US" sz="3600" dirty="0"/>
+          </a:p>
+        </p:txBody>
+      </p:sp>
+      <p:sp>
+        <p:nvSpPr>
+          <p:cNvPr id="12" name="Text 10"/>
+          <p:cNvSpPr/>
+          <p:nvPr/>
+        </p:nvSpPr>
+        <p:spPr>
+          <a:xfrm>
+            <a:off x="2651760" y="2606040"/>
+            <a:ext cx="1874520" cy="365760"/>
+          </a:xfrm>
+          <a:prstGeom prst="rect">
+            <a:avLst/>
+          </a:prstGeom>
+          <a:noFill/>
+          <a:ln/>
+        </p:spPr>
+        <p:txBody>
+          <a:bodyPr wrap="square" rtlCol="0" anchor="ctr"/>
+          <a:lstStyle/>
+          <a:p>
+            <a:pPr algn="ctr" indent="0" marL="0">
+              <a:buNone/>
+            </a:pPr>
+            <a:r>
+              <a:rPr lang="en-US" sz="1400" b="1" dirty="0">
+                <a:solidFill>
+                  <a:srgbClr val="3D2E1F"/>
                 </a:solidFill>
                 <a:latin typeface="Noto Serif SC" pitchFamily="34" charset="0"/>
                 <a:ea typeface="Noto Serif SC" pitchFamily="34" charset="-122"/>
                 <a:cs typeface="Noto Serif SC" pitchFamily="34" charset="-120"/>
               </a:rPr>
-              <a:t>2</a:t>
-            </a:r>
-            <a:endParaRPr lang="en-US" sz="1800" dirty="0"/>
-          </a:p>
-        </p:txBody>
-      </p:sp>
-      <p:sp>
-        <p:nvSpPr>
-          <p:cNvPr id="15" name="Text 13"/>
-          <p:cNvSpPr/>
-          <p:nvPr/>
-        </p:nvSpPr>
-        <p:spPr>
-          <a:xfrm>
-            <a:off x="2788920" y="2560320"/>
-            <a:ext cx="1600200" cy="320040"/>
-          </a:xfrm>
-          <a:prstGeom prst="rect">
-            <a:avLst/>
-          </a:prstGeom>
-          <a:noFill/>
-          <a:ln/>
-        </p:spPr>
-        <p:txBody>
-          <a:bodyPr wrap="square" rtlCol="0" anchor="ctr"/>
-          <a:lstStyle/>
-          <a:p>
-            <a:pPr algn="ctr" indent="0" marL="0">
-              <a:buNone/>
-            </a:pPr>
-            <a:r>
-              <a:rPr lang="en-US" sz="1300" b="1" dirty="0">
-                <a:solidFill>
-                  <a:srgbClr val="3D2E1F"/>
-                </a:solidFill>
-                <a:latin typeface="Noto Serif SC" pitchFamily="34" charset="0"/>
-                <a:ea typeface="Noto Serif SC" pitchFamily="34" charset="-122"/>
-                <a:cs typeface="Noto Serif SC" pitchFamily="34" charset="-120"/>
-              </a:rPr>
-              <a:t>认知行为疗法</a:t>
-            </a:r>
-            <a:endParaRPr lang="en-US" sz="1300" dirty="0"/>
-          </a:p>
-        </p:txBody>
-      </p:sp>
-      <p:sp>
-        <p:nvSpPr>
-          <p:cNvPr id="16" name="Text 14"/>
-          <p:cNvSpPr/>
-          <p:nvPr/>
-        </p:nvSpPr>
-        <p:spPr>
-          <a:xfrm>
-            <a:off x="2788920" y="2926080"/>
-            <a:ext cx="1600200" cy="731520"/>
+              <a:t>AI 正念冥想</a:t>
+            </a:r>
+            <a:endParaRPr lang="en-US" sz="1400" dirty="0"/>
+          </a:p>
+        </p:txBody>
+      </p:sp>
+      <p:sp>
+        <p:nvSpPr>
+          <p:cNvPr id="13" name="Text 11"/>
+          <p:cNvSpPr/>
+          <p:nvPr/>
+        </p:nvSpPr>
+        <p:spPr>
+          <a:xfrm>
+            <a:off x="2834640" y="3063240"/>
+            <a:ext cx="1508760" cy="1188720"/>
           </a:xfrm>
           <a:prstGeom prst="rect">
             <a:avLst/>
@@ -7873,7 +8715,7 @@
                   <a:srgbClr val="7A6B5D"/>
                 </a:solidFill>
               </a:rPr>
-              <a:t>想法—情绪—行为形成循环</a:t>
+              <a:t>4种冥想类型</a:t>
             </a:r>
             <a:endParaRPr lang="en-US" sz="1000" dirty="0"/>
           </a:p>
@@ -7890,43 +8732,24 @@
                   <a:srgbClr val="7A6B5D"/>
                 </a:solidFill>
               </a:rPr>
-              <a:t>通过认知重构打破负向循环</a:t>
+              <a:t>呼吸动画+环境音</a:t>
             </a:r>
             <a:endParaRPr lang="en-US" sz="1000" dirty="0"/>
           </a:p>
-        </p:txBody>
-      </p:sp>
-      <p:sp>
-        <p:nvSpPr>
-          <p:cNvPr id="17" name="Text 15"/>
-          <p:cNvSpPr/>
-          <p:nvPr/>
-        </p:nvSpPr>
-        <p:spPr>
-          <a:xfrm>
-            <a:off x="2788920" y="3749040"/>
-            <a:ext cx="1600200" cy="274320"/>
-          </a:xfrm>
-          <a:prstGeom prst="rect">
-            <a:avLst/>
-          </a:prstGeom>
-          <a:noFill/>
-          <a:ln/>
-        </p:spPr>
-        <p:txBody>
-          <a:bodyPr wrap="square" rtlCol="0" anchor="ctr"/>
-          <a:lstStyle/>
-          <a:p>
-            <a:pPr algn="ctr" indent="0" marL="0">
-              <a:buNone/>
-            </a:pPr>
-            <a:r>
-              <a:rPr lang="en-US" sz="1000" b="1" dirty="0">
-                <a:solidFill>
-                  <a:srgbClr val="F6A623"/>
-                </a:solidFill>
-              </a:rPr>
-              <a:t>→ 3轮CBT对话引导</a:t>
+          <a:p>
+            <a:pPr algn="ctr" indent="0" marL="0">
+              <a:lnSpc>
+                <a:spcPct val="150000"/>
+              </a:lnSpc>
+              <a:buNone/>
+            </a:pPr>
+            <a:r>
+              <a:rPr lang="en-US" sz="1000" dirty="0">
+                <a:solidFill>
+                  <a:srgbClr val="7A6B5D"/>
+                </a:solidFill>
+              </a:rPr>
+              <a:t>AI 个性化引导</a:t>
             </a:r>
             <a:endParaRPr lang="en-US" sz="1000" dirty="0"/>
           </a:p>
@@ -7934,14 +8757,14 @@
       </p:sp>
       <p:sp>
         <p:nvSpPr>
-          <p:cNvPr id="18" name="Shape 16"/>
+          <p:cNvPr id="14" name="Shape 12"/>
           <p:cNvSpPr/>
           <p:nvPr/>
         </p:nvSpPr>
         <p:spPr>
           <a:xfrm>
             <a:off x="4663440" y="1737360"/>
-            <a:ext cx="1874520" cy="2834640"/>
+            <a:ext cx="1874520" cy="2743200"/>
           </a:xfrm>
           <a:prstGeom prst="roundRect">
             <a:avLst>
@@ -7970,112 +8793,89 @@
       </p:sp>
       <p:sp>
         <p:nvSpPr>
-          <p:cNvPr id="19" name="Shape 17"/>
-          <p:cNvSpPr/>
-          <p:nvPr/>
-        </p:nvSpPr>
-        <p:spPr>
-          <a:xfrm>
-            <a:off x="5303520" y="1920240"/>
-            <a:ext cx="502920" cy="502920"/>
-          </a:xfrm>
-          <a:prstGeom prst="ellipse">
-            <a:avLst/>
-          </a:prstGeom>
-          <a:solidFill>
-            <a:srgbClr val="86C7A3"/>
-          </a:solidFill>
-          <a:ln/>
-        </p:spPr>
-      </p:sp>
-      <p:sp>
-        <p:nvSpPr>
-          <p:cNvPr id="20" name="Text 18"/>
-          <p:cNvSpPr/>
-          <p:nvPr/>
-        </p:nvSpPr>
-        <p:spPr>
-          <a:xfrm>
-            <a:off x="5303520" y="1920240"/>
-            <a:ext cx="502920" cy="502920"/>
-          </a:xfrm>
-          <a:prstGeom prst="rect">
-            <a:avLst/>
-          </a:prstGeom>
-          <a:noFill/>
-          <a:ln/>
-        </p:spPr>
-        <p:txBody>
-          <a:bodyPr wrap="square" rtlCol="0" anchor="ctr"/>
-          <a:lstStyle/>
-          <a:p>
-            <a:pPr algn="ctr" indent="0" marL="0">
-              <a:buNone/>
-            </a:pPr>
-            <a:r>
-              <a:rPr lang="en-US" sz="1800" b="1" dirty="0">
-                <a:solidFill>
-                  <a:srgbClr val="FFFFFF"/>
+          <p:cNvPr id="15" name="Text 13"/>
+          <p:cNvSpPr/>
+          <p:nvPr/>
+        </p:nvSpPr>
+        <p:spPr>
+          <a:xfrm>
+            <a:off x="4663440" y="1920240"/>
+            <a:ext cx="1874520" cy="640080"/>
+          </a:xfrm>
+          <a:prstGeom prst="rect">
+            <a:avLst/>
+          </a:prstGeom>
+          <a:noFill/>
+          <a:ln/>
+        </p:spPr>
+        <p:txBody>
+          <a:bodyPr wrap="square" rtlCol="0" anchor="ctr"/>
+          <a:lstStyle/>
+          <a:p>
+            <a:pPr algn="ctr" indent="0" marL="0">
+              <a:buNone/>
+            </a:pPr>
+            <a:r>
+              <a:rPr lang="en-US" sz="3600" dirty="0">
+                <a:solidFill>
+                  <a:srgbClr val="000000"/>
+                </a:solidFill>
+              </a:rPr>
+              <a:t>🎨</a:t>
+            </a:r>
+            <a:endParaRPr lang="en-US" sz="3600" dirty="0"/>
+          </a:p>
+        </p:txBody>
+      </p:sp>
+      <p:sp>
+        <p:nvSpPr>
+          <p:cNvPr id="16" name="Text 14"/>
+          <p:cNvSpPr/>
+          <p:nvPr/>
+        </p:nvSpPr>
+        <p:spPr>
+          <a:xfrm>
+            <a:off x="4663440" y="2606040"/>
+            <a:ext cx="1874520" cy="365760"/>
+          </a:xfrm>
+          <a:prstGeom prst="rect">
+            <a:avLst/>
+          </a:prstGeom>
+          <a:noFill/>
+          <a:ln/>
+        </p:spPr>
+        <p:txBody>
+          <a:bodyPr wrap="square" rtlCol="0" anchor="ctr"/>
+          <a:lstStyle/>
+          <a:p>
+            <a:pPr algn="ctr" indent="0" marL="0">
+              <a:buNone/>
+            </a:pPr>
+            <a:r>
+              <a:rPr lang="en-US" sz="1400" b="1" dirty="0">
+                <a:solidFill>
+                  <a:srgbClr val="3D2E1F"/>
                 </a:solidFill>
                 <a:latin typeface="Noto Serif SC" pitchFamily="34" charset="0"/>
                 <a:ea typeface="Noto Serif SC" pitchFamily="34" charset="-122"/>
                 <a:cs typeface="Noto Serif SC" pitchFamily="34" charset="-120"/>
               </a:rPr>
-              <a:t>3</a:t>
-            </a:r>
-            <a:endParaRPr lang="en-US" sz="1800" dirty="0"/>
-          </a:p>
-        </p:txBody>
-      </p:sp>
-      <p:sp>
-        <p:nvSpPr>
-          <p:cNvPr id="21" name="Text 19"/>
-          <p:cNvSpPr/>
-          <p:nvPr/>
-        </p:nvSpPr>
-        <p:spPr>
-          <a:xfrm>
-            <a:off x="4800600" y="2560320"/>
-            <a:ext cx="1600200" cy="320040"/>
-          </a:xfrm>
-          <a:prstGeom prst="rect">
-            <a:avLst/>
-          </a:prstGeom>
-          <a:noFill/>
-          <a:ln/>
-        </p:spPr>
-        <p:txBody>
-          <a:bodyPr wrap="square" rtlCol="0" anchor="ctr"/>
-          <a:lstStyle/>
-          <a:p>
-            <a:pPr algn="ctr" indent="0" marL="0">
-              <a:buNone/>
-            </a:pPr>
-            <a:r>
-              <a:rPr lang="en-US" sz="1300" b="1" dirty="0">
-                <a:solidFill>
-                  <a:srgbClr val="3D2E1F"/>
-                </a:solidFill>
-                <a:latin typeface="Noto Serif SC" pitchFamily="34" charset="0"/>
-                <a:ea typeface="Noto Serif SC" pitchFamily="34" charset="-122"/>
-                <a:cs typeface="Noto Serif SC" pitchFamily="34" charset="-120"/>
-              </a:rPr>
-              <a:t>正念减压</a:t>
-            </a:r>
-            <a:endParaRPr lang="en-US" sz="1300" dirty="0"/>
-          </a:p>
-        </p:txBody>
-      </p:sp>
-      <p:sp>
-        <p:nvSpPr>
-          <p:cNvPr id="22" name="Text 20"/>
-          <p:cNvSpPr/>
-          <p:nvPr/>
-        </p:nvSpPr>
-        <p:spPr>
-          <a:xfrm>
-            <a:off x="4800600" y="2926080"/>
-            <a:ext cx="1600200" cy="731520"/>
+              <a:t>情绪涂鸦</a:t>
+            </a:r>
+            <a:endParaRPr lang="en-US" sz="1400" dirty="0"/>
+          </a:p>
+        </p:txBody>
+      </p:sp>
+      <p:sp>
+        <p:nvSpPr>
+          <p:cNvPr id="17" name="Text 15"/>
+          <p:cNvSpPr/>
+          <p:nvPr/>
+        </p:nvSpPr>
+        <p:spPr>
+          <a:xfrm>
+            <a:off x="4846320" y="3063240"/>
+            <a:ext cx="1508760" cy="1188720"/>
           </a:xfrm>
           <a:prstGeom prst="rect">
             <a:avLst/>
@@ -8099,7 +8899,7 @@
                   <a:srgbClr val="7A6B5D"/>
                 </a:solidFill>
               </a:rPr>
-              <a:t>提升当下觉察</a:t>
+              <a:t>4种艺术画笔</a:t>
             </a:r>
             <a:endParaRPr lang="en-US" sz="1000" dirty="0"/>
           </a:p>
@@ -8116,43 +8916,24 @@
                   <a:srgbClr val="7A6B5D"/>
                 </a:solidFill>
               </a:rPr>
-              <a:t>停止思维反刍，调节自主神经</a:t>
+              <a:t>AI 色彩情绪分析</a:t>
             </a:r>
             <a:endParaRPr lang="en-US" sz="1000" dirty="0"/>
           </a:p>
-        </p:txBody>
-      </p:sp>
-      <p:sp>
-        <p:nvSpPr>
-          <p:cNvPr id="23" name="Text 21"/>
-          <p:cNvSpPr/>
-          <p:nvPr/>
-        </p:nvSpPr>
-        <p:spPr>
-          <a:xfrm>
-            <a:off x="4800600" y="3749040"/>
-            <a:ext cx="1600200" cy="274320"/>
-          </a:xfrm>
-          <a:prstGeom prst="rect">
-            <a:avLst/>
-          </a:prstGeom>
-          <a:noFill/>
-          <a:ln/>
-        </p:spPr>
-        <p:txBody>
-          <a:bodyPr wrap="square" rtlCol="0" anchor="ctr"/>
-          <a:lstStyle/>
-          <a:p>
-            <a:pPr algn="ctr" indent="0" marL="0">
-              <a:buNone/>
-            </a:pPr>
-            <a:r>
-              <a:rPr lang="en-US" sz="1000" b="1" dirty="0">
-                <a:solidFill>
-                  <a:srgbClr val="F6A623"/>
-                </a:solidFill>
-              </a:rPr>
-              <a:t>→ 3种呼吸引导模式</a:t>
+          <a:p>
+            <a:pPr algn="ctr" indent="0" marL="0">
+              <a:lnSpc>
+                <a:spcPct val="150000"/>
+              </a:lnSpc>
+              <a:buNone/>
+            </a:pPr>
+            <a:r>
+              <a:rPr lang="en-US" sz="1000" dirty="0">
+                <a:solidFill>
+                  <a:srgbClr val="7A6B5D"/>
+                </a:solidFill>
+              </a:rPr>
+              <a:t>个人画廊保存</a:t>
             </a:r>
             <a:endParaRPr lang="en-US" sz="1000" dirty="0"/>
           </a:p>
@@ -8160,14 +8941,14 @@
       </p:sp>
       <p:sp>
         <p:nvSpPr>
-          <p:cNvPr id="24" name="Shape 22"/>
+          <p:cNvPr id="18" name="Shape 16"/>
           <p:cNvSpPr/>
           <p:nvPr/>
         </p:nvSpPr>
         <p:spPr>
           <a:xfrm>
             <a:off x="6675120" y="1737360"/>
-            <a:ext cx="1874520" cy="2834640"/>
+            <a:ext cx="1874520" cy="2743200"/>
           </a:xfrm>
           <a:prstGeom prst="roundRect">
             <a:avLst>
@@ -8196,112 +8977,89 @@
       </p:sp>
       <p:sp>
         <p:nvSpPr>
-          <p:cNvPr id="25" name="Shape 23"/>
-          <p:cNvSpPr/>
-          <p:nvPr/>
-        </p:nvSpPr>
-        <p:spPr>
-          <a:xfrm>
-            <a:off x="7315200" y="1920240"/>
-            <a:ext cx="502920" cy="502920"/>
-          </a:xfrm>
-          <a:prstGeom prst="ellipse">
-            <a:avLst/>
-          </a:prstGeom>
-          <a:solidFill>
-            <a:srgbClr val="FDA085"/>
-          </a:solidFill>
-          <a:ln/>
-        </p:spPr>
-      </p:sp>
-      <p:sp>
-        <p:nvSpPr>
-          <p:cNvPr id="26" name="Text 24"/>
-          <p:cNvSpPr/>
-          <p:nvPr/>
-        </p:nvSpPr>
-        <p:spPr>
-          <a:xfrm>
-            <a:off x="7315200" y="1920240"/>
-            <a:ext cx="502920" cy="502920"/>
-          </a:xfrm>
-          <a:prstGeom prst="rect">
-            <a:avLst/>
-          </a:prstGeom>
-          <a:noFill/>
-          <a:ln/>
-        </p:spPr>
-        <p:txBody>
-          <a:bodyPr wrap="square" rtlCol="0" anchor="ctr"/>
-          <a:lstStyle/>
-          <a:p>
-            <a:pPr algn="ctr" indent="0" marL="0">
-              <a:buNone/>
-            </a:pPr>
-            <a:r>
-              <a:rPr lang="en-US" sz="1800" b="1" dirty="0">
-                <a:solidFill>
-                  <a:srgbClr val="FFFFFF"/>
+          <p:cNvPr id="19" name="Text 17"/>
+          <p:cNvSpPr/>
+          <p:nvPr/>
+        </p:nvSpPr>
+        <p:spPr>
+          <a:xfrm>
+            <a:off x="6675120" y="1920240"/>
+            <a:ext cx="1874520" cy="640080"/>
+          </a:xfrm>
+          <a:prstGeom prst="rect">
+            <a:avLst/>
+          </a:prstGeom>
+          <a:noFill/>
+          <a:ln/>
+        </p:spPr>
+        <p:txBody>
+          <a:bodyPr wrap="square" rtlCol="0" anchor="ctr"/>
+          <a:lstStyle/>
+          <a:p>
+            <a:pPr algn="ctr" indent="0" marL="0">
+              <a:buNone/>
+            </a:pPr>
+            <a:r>
+              <a:rPr lang="en-US" sz="3600" dirty="0">
+                <a:solidFill>
+                  <a:srgbClr val="000000"/>
+                </a:solidFill>
+              </a:rPr>
+              <a:t>📅</a:t>
+            </a:r>
+            <a:endParaRPr lang="en-US" sz="3600" dirty="0"/>
+          </a:p>
+        </p:txBody>
+      </p:sp>
+      <p:sp>
+        <p:nvSpPr>
+          <p:cNvPr id="20" name="Text 18"/>
+          <p:cNvSpPr/>
+          <p:nvPr/>
+        </p:nvSpPr>
+        <p:spPr>
+          <a:xfrm>
+            <a:off x="6675120" y="2606040"/>
+            <a:ext cx="1874520" cy="365760"/>
+          </a:xfrm>
+          <a:prstGeom prst="rect">
+            <a:avLst/>
+          </a:prstGeom>
+          <a:noFill/>
+          <a:ln/>
+        </p:spPr>
+        <p:txBody>
+          <a:bodyPr wrap="square" rtlCol="0" anchor="ctr"/>
+          <a:lstStyle/>
+          <a:p>
+            <a:pPr algn="ctr" indent="0" marL="0">
+              <a:buNone/>
+            </a:pPr>
+            <a:r>
+              <a:rPr lang="en-US" sz="1400" b="1" dirty="0">
+                <a:solidFill>
+                  <a:srgbClr val="3D2E1F"/>
                 </a:solidFill>
                 <a:latin typeface="Noto Serif SC" pitchFamily="34" charset="0"/>
                 <a:ea typeface="Noto Serif SC" pitchFamily="34" charset="-122"/>
                 <a:cs typeface="Noto Serif SC" pitchFamily="34" charset="-120"/>
               </a:rPr>
-              <a:t>4</a:t>
-            </a:r>
-            <a:endParaRPr lang="en-US" sz="1800" dirty="0"/>
-          </a:p>
-        </p:txBody>
-      </p:sp>
-      <p:sp>
-        <p:nvSpPr>
-          <p:cNvPr id="27" name="Text 25"/>
-          <p:cNvSpPr/>
-          <p:nvPr/>
-        </p:nvSpPr>
-        <p:spPr>
-          <a:xfrm>
-            <a:off x="6812280" y="2560320"/>
-            <a:ext cx="1600200" cy="320040"/>
-          </a:xfrm>
-          <a:prstGeom prst="rect">
-            <a:avLst/>
-          </a:prstGeom>
-          <a:noFill/>
-          <a:ln/>
-        </p:spPr>
-        <p:txBody>
-          <a:bodyPr wrap="square" rtlCol="0" anchor="ctr"/>
-          <a:lstStyle/>
-          <a:p>
-            <a:pPr algn="ctr" indent="0" marL="0">
-              <a:buNone/>
-            </a:pPr>
-            <a:r>
-              <a:rPr lang="en-US" sz="1300" b="1" dirty="0">
-                <a:solidFill>
-                  <a:srgbClr val="3D2E1F"/>
-                </a:solidFill>
-                <a:latin typeface="Noto Serif SC" pitchFamily="34" charset="0"/>
-                <a:ea typeface="Noto Serif SC" pitchFamily="34" charset="-122"/>
-                <a:cs typeface="Noto Serif SC" pitchFamily="34" charset="-120"/>
-              </a:rPr>
-              <a:t>积极心理学</a:t>
-            </a:r>
-            <a:endParaRPr lang="en-US" sz="1300" dirty="0"/>
-          </a:p>
-        </p:txBody>
-      </p:sp>
-      <p:sp>
-        <p:nvSpPr>
-          <p:cNvPr id="28" name="Text 26"/>
-          <p:cNvSpPr/>
-          <p:nvPr/>
-        </p:nvSpPr>
-        <p:spPr>
-          <a:xfrm>
-            <a:off x="6812280" y="2926080"/>
-            <a:ext cx="1600200" cy="731520"/>
+              <a:t>情绪日历</a:t>
+            </a:r>
+            <a:endParaRPr lang="en-US" sz="1400" dirty="0"/>
+          </a:p>
+        </p:txBody>
+      </p:sp>
+      <p:sp>
+        <p:nvSpPr>
+          <p:cNvPr id="21" name="Text 19"/>
+          <p:cNvSpPr/>
+          <p:nvPr/>
+        </p:nvSpPr>
+        <p:spPr>
+          <a:xfrm>
+            <a:off x="6858000" y="3063240"/>
+            <a:ext cx="1508760" cy="1188720"/>
           </a:xfrm>
           <a:prstGeom prst="rect">
             <a:avLst/>
@@ -8325,7 +9083,7 @@
                   <a:srgbClr val="7A6B5D"/>
                 </a:solidFill>
               </a:rPr>
-              <a:t>感恩练习帮助大脑</a:t>
+              <a:t>日历可视化记录</a:t>
             </a:r>
             <a:endParaRPr lang="en-US" sz="1000" dirty="0"/>
           </a:p>
@@ -8342,43 +9100,24 @@
                   <a:srgbClr val="7A6B5D"/>
                 </a:solidFill>
               </a:rPr>
-              <a:t>关注积极面，提升幸福感</a:t>
+              <a:t>连续打卡成就</a:t>
             </a:r>
             <a:endParaRPr lang="en-US" sz="1000" dirty="0"/>
           </a:p>
-        </p:txBody>
-      </p:sp>
-      <p:sp>
-        <p:nvSpPr>
-          <p:cNvPr id="29" name="Text 27"/>
-          <p:cNvSpPr/>
-          <p:nvPr/>
-        </p:nvSpPr>
-        <p:spPr>
-          <a:xfrm>
-            <a:off x="6812280" y="3749040"/>
-            <a:ext cx="1600200" cy="274320"/>
-          </a:xfrm>
-          <a:prstGeom prst="rect">
-            <a:avLst/>
-          </a:prstGeom>
-          <a:noFill/>
-          <a:ln/>
-        </p:spPr>
-        <p:txBody>
-          <a:bodyPr wrap="square" rtlCol="0" anchor="ctr"/>
-          <a:lstStyle/>
-          <a:p>
-            <a:pPr algn="ctr" indent="0" marL="0">
-              <a:buNone/>
-            </a:pPr>
-            <a:r>
-              <a:rPr lang="en-US" sz="1000" b="1" dirty="0">
-                <a:solidFill>
-                  <a:srgbClr val="F6A623"/>
-                </a:solidFill>
-              </a:rPr>
-              <a:t>→ 感恩日记功能</a:t>
+          <a:p>
+            <a:pPr algn="ctr" indent="0" marL="0">
+              <a:lnSpc>
+                <a:spcPct val="150000"/>
+              </a:lnSpc>
+              <a:buNone/>
+            </a:pPr>
+            <a:r>
+              <a:rPr lang="en-US" sz="1000" dirty="0">
+                <a:solidFill>
+                  <a:srgbClr val="7A6B5D"/>
+                </a:solidFill>
+              </a:rPr>
+              <a:t>月度情绪分布</a:t>
             </a:r>
             <a:endParaRPr lang="en-US" sz="1000" dirty="0"/>
           </a:p>
@@ -8424,14 +9163,14 @@
         </p:nvSpPr>
         <p:spPr>
           <a:xfrm>
-            <a:off x="-457200" y="-731520"/>
-            <a:ext cx="2743200" cy="2743200"/>
+            <a:off x="6400800" y="2743200"/>
+            <a:ext cx="3200400" cy="3200400"/>
           </a:xfrm>
           <a:prstGeom prst="ellipse">
             <a:avLst/>
           </a:prstGeom>
           <a:solidFill>
-            <a:srgbClr val="F6A623">
+            <a:srgbClr val="A78BFA">
               <a:alpha val="8000"/>
             </a:srgbClr>
           </a:solidFill>
@@ -8468,7 +9207,7 @@
                   <a:srgbClr val="F6A623"/>
                 </a:solidFill>
               </a:rPr>
-              <a:t>创新亮点</a:t>
+              <a:t>理论依据</a:t>
             </a:r>
             <a:endParaRPr lang="en-US" sz="1000" dirty="0"/>
           </a:p>
@@ -8507,7 +9246,7 @@
                 <a:ea typeface="Noto Serif SC" pitchFamily="34" charset="-122"/>
                 <a:cs typeface="Noto Serif SC" pitchFamily="34" charset="-120"/>
               </a:rPr>
-              <a:t>五大创新亮点</a:t>
+              <a:t>循证心理学基础</a:t>
             </a:r>
             <a:endParaRPr lang="en-US" sz="2800" dirty="0"/>
           </a:p>
@@ -8515,19 +9254,89 @@
       </p:sp>
       <p:sp>
         <p:nvSpPr>
-          <p:cNvPr id="5" name="Shape 3"/>
-          <p:cNvSpPr/>
-          <p:nvPr/>
-        </p:nvSpPr>
-        <p:spPr>
-          <a:xfrm>
-            <a:off x="640080" y="1371600"/>
-            <a:ext cx="502920" cy="502920"/>
+          <p:cNvPr id="5" name="Text 3"/>
+          <p:cNvSpPr/>
+          <p:nvPr/>
+        </p:nvSpPr>
+        <p:spPr>
+          <a:xfrm>
+            <a:off x="640080" y="1188720"/>
+            <a:ext cx="7315200" cy="274320"/>
+          </a:xfrm>
+          <a:prstGeom prst="rect">
+            <a:avLst/>
+          </a:prstGeom>
+          <a:noFill/>
+          <a:ln/>
+        </p:spPr>
+        <p:txBody>
+          <a:bodyPr wrap="square" rtlCol="0" anchor="ctr"/>
+          <a:lstStyle/>
+          <a:p>
+            <a:pPr indent="0" marL="0">
+              <a:buNone/>
+            </a:pPr>
+            <a:r>
+              <a:rPr lang="en-US" sz="1200" dirty="0">
+                <a:solidFill>
+                  <a:srgbClr val="7A6B5D"/>
+                </a:solidFill>
+              </a:rPr>
+              <a:t>每一项功能都有扎实的理论支撑</a:t>
+            </a:r>
+            <a:endParaRPr lang="en-US" sz="1200" dirty="0"/>
+          </a:p>
+        </p:txBody>
+      </p:sp>
+      <p:sp>
+        <p:nvSpPr>
+          <p:cNvPr id="6" name="Shape 4"/>
+          <p:cNvSpPr/>
+          <p:nvPr/>
+        </p:nvSpPr>
+        <p:spPr>
+          <a:xfrm>
+            <a:off x="640080" y="1737360"/>
+            <a:ext cx="1874520" cy="2834640"/>
           </a:xfrm>
           <a:prstGeom prst="roundRect">
             <a:avLst>
-              <a:gd name="adj" fmla="val 14545"/>
+              <a:gd name="adj" fmla="val 7317"/>
             </a:avLst>
+          </a:prstGeom>
+          <a:solidFill>
+            <a:srgbClr val="FFFFFF">
+              <a:alpha val="70000"/>
+            </a:srgbClr>
+          </a:solidFill>
+          <a:ln w="6350">
+            <a:solidFill>
+              <a:srgbClr val="E0D5C5"/>
+            </a:solidFill>
+            <a:prstDash val="solid"/>
+          </a:ln>
+          <a:effectLst>
+            <a:outerShdw sx="100000" sy="100000" kx="0" ky="0" algn="bl" rotWithShape="0" blurRad="76200" dist="25400" dir="8100000">
+              <a:srgbClr val="000000">
+                <a:alpha val="8000"/>
+              </a:srgbClr>
+            </a:outerShdw>
+          </a:effectLst>
+        </p:spPr>
+      </p:sp>
+      <p:sp>
+        <p:nvSpPr>
+          <p:cNvPr id="7" name="Shape 5"/>
+          <p:cNvSpPr/>
+          <p:nvPr/>
+        </p:nvSpPr>
+        <p:spPr>
+          <a:xfrm>
+            <a:off x="1280160" y="1920240"/>
+            <a:ext cx="502920" cy="502920"/>
+          </a:xfrm>
+          <a:prstGeom prst="ellipse">
+            <a:avLst/>
           </a:prstGeom>
           <a:solidFill>
             <a:srgbClr val="F6A623"/>
@@ -8537,13 +9346,13 @@
       </p:sp>
       <p:sp>
         <p:nvSpPr>
-          <p:cNvPr id="6" name="Text 4"/>
-          <p:cNvSpPr/>
-          <p:nvPr/>
-        </p:nvSpPr>
-        <p:spPr>
-          <a:xfrm>
-            <a:off x="640080" y="1371600"/>
+          <p:cNvPr id="8" name="Text 6"/>
+          <p:cNvSpPr/>
+          <p:nvPr/>
+        </p:nvSpPr>
+        <p:spPr>
+          <a:xfrm>
+            <a:off x="1280160" y="1920240"/>
             <a:ext cx="502920" cy="502920"/>
           </a:xfrm>
           <a:prstGeom prst="rect">
@@ -8576,30 +9385,30 @@
       </p:sp>
       <p:sp>
         <p:nvSpPr>
-          <p:cNvPr id="7" name="Text 5"/>
-          <p:cNvSpPr/>
-          <p:nvPr/>
-        </p:nvSpPr>
-        <p:spPr>
-          <a:xfrm>
-            <a:off x="1325880" y="1371600"/>
-            <a:ext cx="2743200" cy="274320"/>
-          </a:xfrm>
-          <a:prstGeom prst="rect">
-            <a:avLst/>
-          </a:prstGeom>
-          <a:noFill/>
-          <a:ln/>
-        </p:spPr>
-        <p:txBody>
-          <a:bodyPr wrap="square" lIns="0" tIns="0" rIns="0" bIns="0" rtlCol="0" anchor="ctr"/>
-          <a:lstStyle/>
-          <a:p>
-            <a:pPr indent="0" marL="0">
-              <a:buNone/>
-            </a:pPr>
-            <a:r>
-              <a:rPr lang="en-US" sz="1400" b="1" dirty="0">
+          <p:cNvPr id="9" name="Text 7"/>
+          <p:cNvSpPr/>
+          <p:nvPr/>
+        </p:nvSpPr>
+        <p:spPr>
+          <a:xfrm>
+            <a:off x="777240" y="2560320"/>
+            <a:ext cx="1600200" cy="320040"/>
+          </a:xfrm>
+          <a:prstGeom prst="rect">
+            <a:avLst/>
+          </a:prstGeom>
+          <a:noFill/>
+          <a:ln/>
+        </p:spPr>
+        <p:txBody>
+          <a:bodyPr wrap="square" rtlCol="0" anchor="ctr"/>
+          <a:lstStyle/>
+          <a:p>
+            <a:pPr algn="ctr" indent="0" marL="0">
+              <a:buNone/>
+            </a:pPr>
+            <a:r>
+              <a:rPr lang="en-US" sz="1300" b="1" dirty="0">
                 <a:solidFill>
                   <a:srgbClr val="3D2E1F"/>
                 </a:solidFill>
@@ -8607,63 +9416,153 @@
                 <a:ea typeface="Noto Serif SC" pitchFamily="34" charset="-122"/>
                 <a:cs typeface="Noto Serif SC" pitchFamily="34" charset="-120"/>
               </a:rPr>
-              <a:t>AI 智能体架构</a:t>
-            </a:r>
-            <a:endParaRPr lang="en-US" sz="1400" dirty="0"/>
-          </a:p>
-        </p:txBody>
-      </p:sp>
-      <p:sp>
-        <p:nvSpPr>
-          <p:cNvPr id="8" name="Text 6"/>
-          <p:cNvSpPr/>
-          <p:nvPr/>
-        </p:nvSpPr>
-        <p:spPr>
-          <a:xfrm>
-            <a:off x="1325880" y="1627632"/>
-            <a:ext cx="6858000" cy="274320"/>
-          </a:xfrm>
-          <a:prstGeom prst="rect">
-            <a:avLst/>
-          </a:prstGeom>
-          <a:noFill/>
-          <a:ln/>
-        </p:spPr>
-        <p:txBody>
-          <a:bodyPr wrap="square" lIns="0" tIns="0" rIns="0" bIns="0" rtlCol="0" anchor="ctr"/>
-          <a:lstStyle/>
-          <a:p>
-            <a:pPr indent="0" marL="0">
-              <a:buNone/>
-            </a:pPr>
-            <a:r>
-              <a:rPr lang="en-US" sz="1100" dirty="0">
+              <a:t>情绪ABC理论</a:t>
+            </a:r>
+            <a:endParaRPr lang="en-US" sz="1300" dirty="0"/>
+          </a:p>
+        </p:txBody>
+      </p:sp>
+      <p:sp>
+        <p:nvSpPr>
+          <p:cNvPr id="10" name="Text 8"/>
+          <p:cNvSpPr/>
+          <p:nvPr/>
+        </p:nvSpPr>
+        <p:spPr>
+          <a:xfrm>
+            <a:off x="777240" y="2926080"/>
+            <a:ext cx="1600200" cy="731520"/>
+          </a:xfrm>
+          <a:prstGeom prst="rect">
+            <a:avLst/>
+          </a:prstGeom>
+          <a:noFill/>
+          <a:ln/>
+        </p:spPr>
+        <p:txBody>
+          <a:bodyPr wrap="square" rtlCol="0" anchor="ctr"/>
+          <a:lstStyle/>
+          <a:p>
+            <a:pPr algn="ctr" indent="0" marL="0">
+              <a:lnSpc>
+                <a:spcPct val="150000"/>
+              </a:lnSpc>
+              <a:buNone/>
+            </a:pPr>
+            <a:r>
+              <a:rPr lang="en-US" sz="1000" dirty="0">
                 <a:solidFill>
                   <a:srgbClr val="7A6B5D"/>
                 </a:solidFill>
               </a:rPr>
-              <a:t>AI 自主判断用户需要，主动调用 10 种工具，从「被动回答」到「主动支持」</a:t>
-            </a:r>
-            <a:endParaRPr lang="en-US" sz="1100" dirty="0"/>
-          </a:p>
-        </p:txBody>
-      </p:sp>
-      <p:sp>
-        <p:nvSpPr>
-          <p:cNvPr id="9" name="Shape 7"/>
-          <p:cNvSpPr/>
-          <p:nvPr/>
-        </p:nvSpPr>
-        <p:spPr>
-          <a:xfrm>
-            <a:off x="640080" y="2057400"/>
-            <a:ext cx="502920" cy="502920"/>
+              <a:t>事件A不直接导致情绪C</a:t>
+            </a:r>
+            <a:endParaRPr lang="en-US" sz="1000" dirty="0"/>
+          </a:p>
+          <a:p>
+            <a:pPr algn="ctr" indent="0" marL="0">
+              <a:lnSpc>
+                <a:spcPct val="150000"/>
+              </a:lnSpc>
+              <a:buNone/>
+            </a:pPr>
+            <a:r>
+              <a:rPr lang="en-US" sz="1000" dirty="0">
+                <a:solidFill>
+                  <a:srgbClr val="7A6B5D"/>
+                </a:solidFill>
+              </a:rPr>
+              <a:t>不合理信念B才是内耗根源</a:t>
+            </a:r>
+            <a:endParaRPr lang="en-US" sz="1000" dirty="0"/>
+          </a:p>
+        </p:txBody>
+      </p:sp>
+      <p:sp>
+        <p:nvSpPr>
+          <p:cNvPr id="11" name="Text 9"/>
+          <p:cNvSpPr/>
+          <p:nvPr/>
+        </p:nvSpPr>
+        <p:spPr>
+          <a:xfrm>
+            <a:off x="777240" y="3749040"/>
+            <a:ext cx="1600200" cy="274320"/>
+          </a:xfrm>
+          <a:prstGeom prst="rect">
+            <a:avLst/>
+          </a:prstGeom>
+          <a:noFill/>
+          <a:ln/>
+        </p:spPr>
+        <p:txBody>
+          <a:bodyPr wrap="square" rtlCol="0" anchor="ctr"/>
+          <a:lstStyle/>
+          <a:p>
+            <a:pPr algn="ctr" indent="0" marL="0">
+              <a:buNone/>
+            </a:pPr>
+            <a:r>
+              <a:rPr lang="en-US" sz="1000" b="1" dirty="0">
+                <a:solidFill>
+                  <a:srgbClr val="F6A623"/>
+                </a:solidFill>
+              </a:rPr>
+              <a:t>→ 识别不合理信念</a:t>
+            </a:r>
+            <a:endParaRPr lang="en-US" sz="1000" dirty="0"/>
+          </a:p>
+        </p:txBody>
+      </p:sp>
+      <p:sp>
+        <p:nvSpPr>
+          <p:cNvPr id="12" name="Shape 10"/>
+          <p:cNvSpPr/>
+          <p:nvPr/>
+        </p:nvSpPr>
+        <p:spPr>
+          <a:xfrm>
+            <a:off x="2651760" y="1737360"/>
+            <a:ext cx="1874520" cy="2834640"/>
           </a:xfrm>
           <a:prstGeom prst="roundRect">
             <a:avLst>
-              <a:gd name="adj" fmla="val 14545"/>
+              <a:gd name="adj" fmla="val 7317"/>
             </a:avLst>
+          </a:prstGeom>
+          <a:solidFill>
+            <a:srgbClr val="FFFFFF">
+              <a:alpha val="70000"/>
+            </a:srgbClr>
+          </a:solidFill>
+          <a:ln w="6350">
+            <a:solidFill>
+              <a:srgbClr val="E0D5C5"/>
+            </a:solidFill>
+            <a:prstDash val="solid"/>
+          </a:ln>
+          <a:effectLst>
+            <a:outerShdw sx="100000" sy="100000" kx="0" ky="0" algn="bl" rotWithShape="0" blurRad="76200" dist="25400" dir="8100000">
+              <a:srgbClr val="000000">
+                <a:alpha val="8000"/>
+              </a:srgbClr>
+            </a:outerShdw>
+          </a:effectLst>
+        </p:spPr>
+      </p:sp>
+      <p:sp>
+        <p:nvSpPr>
+          <p:cNvPr id="13" name="Shape 11"/>
+          <p:cNvSpPr/>
+          <p:nvPr/>
+        </p:nvSpPr>
+        <p:spPr>
+          <a:xfrm>
+            <a:off x="3291840" y="1920240"/>
+            <a:ext cx="502920" cy="502920"/>
+          </a:xfrm>
+          <a:prstGeom prst="ellipse">
+            <a:avLst/>
           </a:prstGeom>
           <a:solidFill>
             <a:srgbClr val="A78BFA"/>
@@ -8673,13 +9572,13 @@
       </p:sp>
       <p:sp>
         <p:nvSpPr>
-          <p:cNvPr id="10" name="Text 8"/>
-          <p:cNvSpPr/>
-          <p:nvPr/>
-        </p:nvSpPr>
-        <p:spPr>
-          <a:xfrm>
-            <a:off x="640080" y="2057400"/>
+          <p:cNvPr id="14" name="Text 12"/>
+          <p:cNvSpPr/>
+          <p:nvPr/>
+        </p:nvSpPr>
+        <p:spPr>
+          <a:xfrm>
+            <a:off x="3291840" y="1920240"/>
             <a:ext cx="502920" cy="502920"/>
           </a:xfrm>
           <a:prstGeom prst="rect">
@@ -8712,30 +9611,30 @@
       </p:sp>
       <p:sp>
         <p:nvSpPr>
-          <p:cNvPr id="11" name="Text 9"/>
-          <p:cNvSpPr/>
-          <p:nvPr/>
-        </p:nvSpPr>
-        <p:spPr>
-          <a:xfrm>
-            <a:off x="1325880" y="2057400"/>
-            <a:ext cx="2743200" cy="274320"/>
-          </a:xfrm>
-          <a:prstGeom prst="rect">
-            <a:avLst/>
-          </a:prstGeom>
-          <a:noFill/>
-          <a:ln/>
-        </p:spPr>
-        <p:txBody>
-          <a:bodyPr wrap="square" lIns="0" tIns="0" rIns="0" bIns="0" rtlCol="0" anchor="ctr"/>
-          <a:lstStyle/>
-          <a:p>
-            <a:pPr indent="0" marL="0">
-              <a:buNone/>
-            </a:pPr>
-            <a:r>
-              <a:rPr lang="en-US" sz="1400" b="1" dirty="0">
+          <p:cNvPr id="15" name="Text 13"/>
+          <p:cNvSpPr/>
+          <p:nvPr/>
+        </p:nvSpPr>
+        <p:spPr>
+          <a:xfrm>
+            <a:off x="2788920" y="2560320"/>
+            <a:ext cx="1600200" cy="320040"/>
+          </a:xfrm>
+          <a:prstGeom prst="rect">
+            <a:avLst/>
+          </a:prstGeom>
+          <a:noFill/>
+          <a:ln/>
+        </p:spPr>
+        <p:txBody>
+          <a:bodyPr wrap="square" rtlCol="0" anchor="ctr"/>
+          <a:lstStyle/>
+          <a:p>
+            <a:pPr algn="ctr" indent="0" marL="0">
+              <a:buNone/>
+            </a:pPr>
+            <a:r>
+              <a:rPr lang="en-US" sz="1300" b="1" dirty="0">
                 <a:solidFill>
                   <a:srgbClr val="3D2E1F"/>
                 </a:solidFill>
@@ -8743,63 +9642,153 @@
                 <a:ea typeface="Noto Serif SC" pitchFamily="34" charset="-122"/>
                 <a:cs typeface="Noto Serif SC" pitchFamily="34" charset="-120"/>
               </a:rPr>
-              <a:t>结构化疗愈流程</a:t>
-            </a:r>
-            <a:endParaRPr lang="en-US" sz="1400" dirty="0"/>
-          </a:p>
-        </p:txBody>
-      </p:sp>
-      <p:sp>
-        <p:nvSpPr>
-          <p:cNvPr id="12" name="Text 10"/>
-          <p:cNvSpPr/>
-          <p:nvPr/>
-        </p:nvSpPr>
-        <p:spPr>
-          <a:xfrm>
-            <a:off x="1325880" y="2313432"/>
-            <a:ext cx="6858000" cy="274320"/>
-          </a:xfrm>
-          <a:prstGeom prst="rect">
-            <a:avLst/>
-          </a:prstGeom>
-          <a:noFill/>
-          <a:ln/>
-        </p:spPr>
-        <p:txBody>
-          <a:bodyPr wrap="square" lIns="0" tIns="0" rIns="0" bIns="0" rtlCol="0" anchor="ctr"/>
-          <a:lstStyle/>
-          <a:p>
-            <a:pPr indent="0" marL="0">
-              <a:buNone/>
-            </a:pPr>
-            <a:r>
-              <a:rPr lang="en-US" sz="1100" dirty="0">
+              <a:t>认知行为疗法</a:t>
+            </a:r>
+            <a:endParaRPr lang="en-US" sz="1300" dirty="0"/>
+          </a:p>
+        </p:txBody>
+      </p:sp>
+      <p:sp>
+        <p:nvSpPr>
+          <p:cNvPr id="16" name="Text 14"/>
+          <p:cNvSpPr/>
+          <p:nvPr/>
+        </p:nvSpPr>
+        <p:spPr>
+          <a:xfrm>
+            <a:off x="2788920" y="2926080"/>
+            <a:ext cx="1600200" cy="731520"/>
+          </a:xfrm>
+          <a:prstGeom prst="rect">
+            <a:avLst/>
+          </a:prstGeom>
+          <a:noFill/>
+          <a:ln/>
+        </p:spPr>
+        <p:txBody>
+          <a:bodyPr wrap="square" rtlCol="0" anchor="ctr"/>
+          <a:lstStyle/>
+          <a:p>
+            <a:pPr algn="ctr" indent="0" marL="0">
+              <a:lnSpc>
+                <a:spcPct val="150000"/>
+              </a:lnSpc>
+              <a:buNone/>
+            </a:pPr>
+            <a:r>
+              <a:rPr lang="en-US" sz="1000" dirty="0">
                 <a:solidFill>
                   <a:srgbClr val="7A6B5D"/>
                 </a:solidFill>
               </a:rPr>
-              <a:t>5步引导整合循证心理学方法，用户跟随引导即可完成认知重构</a:t>
-            </a:r>
-            <a:endParaRPr lang="en-US" sz="1100" dirty="0"/>
-          </a:p>
-        </p:txBody>
-      </p:sp>
-      <p:sp>
-        <p:nvSpPr>
-          <p:cNvPr id="13" name="Shape 11"/>
-          <p:cNvSpPr/>
-          <p:nvPr/>
-        </p:nvSpPr>
-        <p:spPr>
-          <a:xfrm>
-            <a:off x="640080" y="2743200"/>
-            <a:ext cx="502920" cy="502920"/>
+              <a:t>想法—情绪—行为形成循环</a:t>
+            </a:r>
+            <a:endParaRPr lang="en-US" sz="1000" dirty="0"/>
+          </a:p>
+          <a:p>
+            <a:pPr algn="ctr" indent="0" marL="0">
+              <a:lnSpc>
+                <a:spcPct val="150000"/>
+              </a:lnSpc>
+              <a:buNone/>
+            </a:pPr>
+            <a:r>
+              <a:rPr lang="en-US" sz="1000" dirty="0">
+                <a:solidFill>
+                  <a:srgbClr val="7A6B5D"/>
+                </a:solidFill>
+              </a:rPr>
+              <a:t>通过认知重构打破负向循环</a:t>
+            </a:r>
+            <a:endParaRPr lang="en-US" sz="1000" dirty="0"/>
+          </a:p>
+        </p:txBody>
+      </p:sp>
+      <p:sp>
+        <p:nvSpPr>
+          <p:cNvPr id="17" name="Text 15"/>
+          <p:cNvSpPr/>
+          <p:nvPr/>
+        </p:nvSpPr>
+        <p:spPr>
+          <a:xfrm>
+            <a:off x="2788920" y="3749040"/>
+            <a:ext cx="1600200" cy="274320"/>
+          </a:xfrm>
+          <a:prstGeom prst="rect">
+            <a:avLst/>
+          </a:prstGeom>
+          <a:noFill/>
+          <a:ln/>
+        </p:spPr>
+        <p:txBody>
+          <a:bodyPr wrap="square" rtlCol="0" anchor="ctr"/>
+          <a:lstStyle/>
+          <a:p>
+            <a:pPr algn="ctr" indent="0" marL="0">
+              <a:buNone/>
+            </a:pPr>
+            <a:r>
+              <a:rPr lang="en-US" sz="1000" b="1" dirty="0">
+                <a:solidFill>
+                  <a:srgbClr val="F6A623"/>
+                </a:solidFill>
+              </a:rPr>
+              <a:t>→ 3轮CBT对话引导</a:t>
+            </a:r>
+            <a:endParaRPr lang="en-US" sz="1000" dirty="0"/>
+          </a:p>
+        </p:txBody>
+      </p:sp>
+      <p:sp>
+        <p:nvSpPr>
+          <p:cNvPr id="18" name="Shape 16"/>
+          <p:cNvSpPr/>
+          <p:nvPr/>
+        </p:nvSpPr>
+        <p:spPr>
+          <a:xfrm>
+            <a:off x="4663440" y="1737360"/>
+            <a:ext cx="1874520" cy="2834640"/>
           </a:xfrm>
           <a:prstGeom prst="roundRect">
             <a:avLst>
-              <a:gd name="adj" fmla="val 14545"/>
+              <a:gd name="adj" fmla="val 7317"/>
             </a:avLst>
+          </a:prstGeom>
+          <a:solidFill>
+            <a:srgbClr val="FFFFFF">
+              <a:alpha val="70000"/>
+            </a:srgbClr>
+          </a:solidFill>
+          <a:ln w="6350">
+            <a:solidFill>
+              <a:srgbClr val="E0D5C5"/>
+            </a:solidFill>
+            <a:prstDash val="solid"/>
+          </a:ln>
+          <a:effectLst>
+            <a:outerShdw sx="100000" sy="100000" kx="0" ky="0" algn="bl" rotWithShape="0" blurRad="76200" dist="25400" dir="8100000">
+              <a:srgbClr val="000000">
+                <a:alpha val="8000"/>
+              </a:srgbClr>
+            </a:outerShdw>
+          </a:effectLst>
+        </p:spPr>
+      </p:sp>
+      <p:sp>
+        <p:nvSpPr>
+          <p:cNvPr id="19" name="Shape 17"/>
+          <p:cNvSpPr/>
+          <p:nvPr/>
+        </p:nvSpPr>
+        <p:spPr>
+          <a:xfrm>
+            <a:off x="5303520" y="1920240"/>
+            <a:ext cx="502920" cy="502920"/>
+          </a:xfrm>
+          <a:prstGeom prst="ellipse">
+            <a:avLst/>
           </a:prstGeom>
           <a:solidFill>
             <a:srgbClr val="86C7A3"/>
@@ -8809,13 +9798,13 @@
       </p:sp>
       <p:sp>
         <p:nvSpPr>
-          <p:cNvPr id="14" name="Text 12"/>
-          <p:cNvSpPr/>
-          <p:nvPr/>
-        </p:nvSpPr>
-        <p:spPr>
-          <a:xfrm>
-            <a:off x="640080" y="2743200"/>
+          <p:cNvPr id="20" name="Text 18"/>
+          <p:cNvSpPr/>
+          <p:nvPr/>
+        </p:nvSpPr>
+        <p:spPr>
+          <a:xfrm>
+            <a:off x="5303520" y="1920240"/>
             <a:ext cx="502920" cy="502920"/>
           </a:xfrm>
           <a:prstGeom prst="rect">
@@ -8848,30 +9837,30 @@
       </p:sp>
       <p:sp>
         <p:nvSpPr>
-          <p:cNvPr id="15" name="Text 13"/>
-          <p:cNvSpPr/>
-          <p:nvPr/>
-        </p:nvSpPr>
-        <p:spPr>
-          <a:xfrm>
-            <a:off x="1325880" y="2743200"/>
-            <a:ext cx="2743200" cy="274320"/>
-          </a:xfrm>
-          <a:prstGeom prst="rect">
-            <a:avLst/>
-          </a:prstGeom>
-          <a:noFill/>
-          <a:ln/>
-        </p:spPr>
-        <p:txBody>
-          <a:bodyPr wrap="square" lIns="0" tIns="0" rIns="0" bIns="0" rtlCol="0" anchor="ctr"/>
-          <a:lstStyle/>
-          <a:p>
-            <a:pPr indent="0" marL="0">
-              <a:buNone/>
-            </a:pPr>
-            <a:r>
-              <a:rPr lang="en-US" sz="1400" b="1" dirty="0">
+          <p:cNvPr id="21" name="Text 19"/>
+          <p:cNvSpPr/>
+          <p:nvPr/>
+        </p:nvSpPr>
+        <p:spPr>
+          <a:xfrm>
+            <a:off x="4800600" y="2560320"/>
+            <a:ext cx="1600200" cy="320040"/>
+          </a:xfrm>
+          <a:prstGeom prst="rect">
+            <a:avLst/>
+          </a:prstGeom>
+          <a:noFill/>
+          <a:ln/>
+        </p:spPr>
+        <p:txBody>
+          <a:bodyPr wrap="square" rtlCol="0" anchor="ctr"/>
+          <a:lstStyle/>
+          <a:p>
+            <a:pPr algn="ctr" indent="0" marL="0">
+              <a:buNone/>
+            </a:pPr>
+            <a:r>
+              <a:rPr lang="en-US" sz="1300" b="1" dirty="0">
                 <a:solidFill>
                   <a:srgbClr val="3D2E1F"/>
                 </a:solidFill>
@@ -8879,63 +9868,153 @@
                 <a:ea typeface="Noto Serif SC" pitchFamily="34" charset="-122"/>
                 <a:cs typeface="Noto Serif SC" pitchFamily="34" charset="-120"/>
               </a:rPr>
-              <a:t>多模态情绪表达</a:t>
-            </a:r>
-            <a:endParaRPr lang="en-US" sz="1400" dirty="0"/>
-          </a:p>
-        </p:txBody>
-      </p:sp>
-      <p:sp>
-        <p:nvSpPr>
-          <p:cNvPr id="16" name="Text 14"/>
-          <p:cNvSpPr/>
-          <p:nvPr/>
-        </p:nvSpPr>
-        <p:spPr>
-          <a:xfrm>
-            <a:off x="1325880" y="2999232"/>
-            <a:ext cx="6858000" cy="274320"/>
-          </a:xfrm>
-          <a:prstGeom prst="rect">
-            <a:avLst/>
-          </a:prstGeom>
-          <a:noFill/>
-          <a:ln/>
-        </p:spPr>
-        <p:txBody>
-          <a:bodyPr wrap="square" lIns="0" tIns="0" rIns="0" bIns="0" rtlCol="0" anchor="ctr"/>
-          <a:lstStyle/>
-          <a:p>
-            <a:pPr indent="0" marL="0">
-              <a:buNone/>
-            </a:pPr>
-            <a:r>
-              <a:rPr lang="en-US" sz="1100" dirty="0">
+              <a:t>正念减压</a:t>
+            </a:r>
+            <a:endParaRPr lang="en-US" sz="1300" dirty="0"/>
+          </a:p>
+        </p:txBody>
+      </p:sp>
+      <p:sp>
+        <p:nvSpPr>
+          <p:cNvPr id="22" name="Text 20"/>
+          <p:cNvSpPr/>
+          <p:nvPr/>
+        </p:nvSpPr>
+        <p:spPr>
+          <a:xfrm>
+            <a:off x="4800600" y="2926080"/>
+            <a:ext cx="1600200" cy="731520"/>
+          </a:xfrm>
+          <a:prstGeom prst="rect">
+            <a:avLst/>
+          </a:prstGeom>
+          <a:noFill/>
+          <a:ln/>
+        </p:spPr>
+        <p:txBody>
+          <a:bodyPr wrap="square" rtlCol="0" anchor="ctr"/>
+          <a:lstStyle/>
+          <a:p>
+            <a:pPr algn="ctr" indent="0" marL="0">
+              <a:lnSpc>
+                <a:spcPct val="150000"/>
+              </a:lnSpc>
+              <a:buNone/>
+            </a:pPr>
+            <a:r>
+              <a:rPr lang="en-US" sz="1000" dirty="0">
                 <a:solidFill>
                   <a:srgbClr val="7A6B5D"/>
                 </a:solidFill>
               </a:rPr>
-              <a:t>文字、身体、呼吸、创作四维感知，多维度覆盖情绪感知通道</a:t>
-            </a:r>
-            <a:endParaRPr lang="en-US" sz="1100" dirty="0"/>
-          </a:p>
-        </p:txBody>
-      </p:sp>
-      <p:sp>
-        <p:nvSpPr>
-          <p:cNvPr id="17" name="Shape 15"/>
-          <p:cNvSpPr/>
-          <p:nvPr/>
-        </p:nvSpPr>
-        <p:spPr>
-          <a:xfrm>
-            <a:off x="640080" y="3429000"/>
-            <a:ext cx="502920" cy="502920"/>
+              <a:t>提升当下觉察</a:t>
+            </a:r>
+            <a:endParaRPr lang="en-US" sz="1000" dirty="0"/>
+          </a:p>
+          <a:p>
+            <a:pPr algn="ctr" indent="0" marL="0">
+              <a:lnSpc>
+                <a:spcPct val="150000"/>
+              </a:lnSpc>
+              <a:buNone/>
+            </a:pPr>
+            <a:r>
+              <a:rPr lang="en-US" sz="1000" dirty="0">
+                <a:solidFill>
+                  <a:srgbClr val="7A6B5D"/>
+                </a:solidFill>
+              </a:rPr>
+              <a:t>停止思维反刍，调节自主神经</a:t>
+            </a:r>
+            <a:endParaRPr lang="en-US" sz="1000" dirty="0"/>
+          </a:p>
+        </p:txBody>
+      </p:sp>
+      <p:sp>
+        <p:nvSpPr>
+          <p:cNvPr id="23" name="Text 21"/>
+          <p:cNvSpPr/>
+          <p:nvPr/>
+        </p:nvSpPr>
+        <p:spPr>
+          <a:xfrm>
+            <a:off x="4800600" y="3749040"/>
+            <a:ext cx="1600200" cy="274320"/>
+          </a:xfrm>
+          <a:prstGeom prst="rect">
+            <a:avLst/>
+          </a:prstGeom>
+          <a:noFill/>
+          <a:ln/>
+        </p:spPr>
+        <p:txBody>
+          <a:bodyPr wrap="square" rtlCol="0" anchor="ctr"/>
+          <a:lstStyle/>
+          <a:p>
+            <a:pPr algn="ctr" indent="0" marL="0">
+              <a:buNone/>
+            </a:pPr>
+            <a:r>
+              <a:rPr lang="en-US" sz="1000" b="1" dirty="0">
+                <a:solidFill>
+                  <a:srgbClr val="F6A623"/>
+                </a:solidFill>
+              </a:rPr>
+              <a:t>→ 3种呼吸引导模式</a:t>
+            </a:r>
+            <a:endParaRPr lang="en-US" sz="1000" dirty="0"/>
+          </a:p>
+        </p:txBody>
+      </p:sp>
+      <p:sp>
+        <p:nvSpPr>
+          <p:cNvPr id="24" name="Shape 22"/>
+          <p:cNvSpPr/>
+          <p:nvPr/>
+        </p:nvSpPr>
+        <p:spPr>
+          <a:xfrm>
+            <a:off x="6675120" y="1737360"/>
+            <a:ext cx="1874520" cy="2834640"/>
           </a:xfrm>
           <a:prstGeom prst="roundRect">
             <a:avLst>
-              <a:gd name="adj" fmla="val 14545"/>
+              <a:gd name="adj" fmla="val 7317"/>
             </a:avLst>
+          </a:prstGeom>
+          <a:solidFill>
+            <a:srgbClr val="FFFFFF">
+              <a:alpha val="70000"/>
+            </a:srgbClr>
+          </a:solidFill>
+          <a:ln w="6350">
+            <a:solidFill>
+              <a:srgbClr val="E0D5C5"/>
+            </a:solidFill>
+            <a:prstDash val="solid"/>
+          </a:ln>
+          <a:effectLst>
+            <a:outerShdw sx="100000" sy="100000" kx="0" ky="0" algn="bl" rotWithShape="0" blurRad="76200" dist="25400" dir="8100000">
+              <a:srgbClr val="000000">
+                <a:alpha val="8000"/>
+              </a:srgbClr>
+            </a:outerShdw>
+          </a:effectLst>
+        </p:spPr>
+      </p:sp>
+      <p:sp>
+        <p:nvSpPr>
+          <p:cNvPr id="25" name="Shape 23"/>
+          <p:cNvSpPr/>
+          <p:nvPr/>
+        </p:nvSpPr>
+        <p:spPr>
+          <a:xfrm>
+            <a:off x="7315200" y="1920240"/>
+            <a:ext cx="502920" cy="502920"/>
+          </a:xfrm>
+          <a:prstGeom prst="ellipse">
+            <a:avLst/>
           </a:prstGeom>
           <a:solidFill>
             <a:srgbClr val="FDA085"/>
@@ -8945,13 +10024,13 @@
       </p:sp>
       <p:sp>
         <p:nvSpPr>
-          <p:cNvPr id="18" name="Text 16"/>
-          <p:cNvSpPr/>
-          <p:nvPr/>
-        </p:nvSpPr>
-        <p:spPr>
-          <a:xfrm>
-            <a:off x="640080" y="3429000"/>
+          <p:cNvPr id="26" name="Text 24"/>
+          <p:cNvSpPr/>
+          <p:nvPr/>
+        </p:nvSpPr>
+        <p:spPr>
+          <a:xfrm>
+            <a:off x="7315200" y="1920240"/>
             <a:ext cx="502920" cy="502920"/>
           </a:xfrm>
           <a:prstGeom prst="rect">
@@ -8984,30 +10063,30 @@
       </p:sp>
       <p:sp>
         <p:nvSpPr>
-          <p:cNvPr id="19" name="Text 17"/>
-          <p:cNvSpPr/>
-          <p:nvPr/>
-        </p:nvSpPr>
-        <p:spPr>
-          <a:xfrm>
-            <a:off x="1325880" y="3429000"/>
-            <a:ext cx="2743200" cy="274320"/>
-          </a:xfrm>
-          <a:prstGeom prst="rect">
-            <a:avLst/>
-          </a:prstGeom>
-          <a:noFill/>
-          <a:ln/>
-        </p:spPr>
-        <p:txBody>
-          <a:bodyPr wrap="square" lIns="0" tIns="0" rIns="0" bIns="0" rtlCol="0" anchor="ctr"/>
-          <a:lstStyle/>
-          <a:p>
-            <a:pPr indent="0" marL="0">
-              <a:buNone/>
-            </a:pPr>
-            <a:r>
-              <a:rPr lang="en-US" sz="1400" b="1" dirty="0">
+          <p:cNvPr id="27" name="Text 25"/>
+          <p:cNvSpPr/>
+          <p:nvPr/>
+        </p:nvSpPr>
+        <p:spPr>
+          <a:xfrm>
+            <a:off x="6812280" y="2560320"/>
+            <a:ext cx="1600200" cy="320040"/>
+          </a:xfrm>
+          <a:prstGeom prst="rect">
+            <a:avLst/>
+          </a:prstGeom>
+          <a:noFill/>
+          <a:ln/>
+        </p:spPr>
+        <p:txBody>
+          <a:bodyPr wrap="square" rtlCol="0" anchor="ctr"/>
+          <a:lstStyle/>
+          <a:p>
+            <a:pPr algn="ctr" indent="0" marL="0">
+              <a:buNone/>
+            </a:pPr>
+            <a:r>
+              <a:rPr lang="en-US" sz="1300" b="1" dirty="0">
                 <a:solidFill>
                   <a:srgbClr val="3D2E1F"/>
                 </a:solidFill>
@@ -9015,181 +10094,101 @@
                 <a:ea typeface="Noto Serif SC" pitchFamily="34" charset="-122"/>
                 <a:cs typeface="Noto Serif SC" pitchFamily="34" charset="-120"/>
               </a:rPr>
-              <a:t>可视化情绪卡片</a:t>
-            </a:r>
-            <a:endParaRPr lang="en-US" sz="1400" dirty="0"/>
-          </a:p>
-        </p:txBody>
-      </p:sp>
-      <p:sp>
-        <p:nvSpPr>
-          <p:cNvPr id="20" name="Text 18"/>
-          <p:cNvSpPr/>
-          <p:nvPr/>
-        </p:nvSpPr>
-        <p:spPr>
-          <a:xfrm>
-            <a:off x="1325880" y="3685032"/>
-            <a:ext cx="6858000" cy="274320"/>
-          </a:xfrm>
-          <a:prstGeom prst="rect">
-            <a:avLst/>
-          </a:prstGeom>
-          <a:noFill/>
-          <a:ln/>
-        </p:spPr>
-        <p:txBody>
-          <a:bodyPr wrap="square" lIns="0" tIns="0" rIns="0" bIns="0" rtlCol="0" anchor="ctr"/>
-          <a:lstStyle/>
-          <a:p>
-            <a:pPr indent="0" marL="0">
-              <a:buNone/>
-            </a:pPr>
-            <a:r>
-              <a:rPr lang="en-US" sz="1100" dirty="0">
+              <a:t>积极心理学</a:t>
+            </a:r>
+            <a:endParaRPr lang="en-US" sz="1300" dirty="0"/>
+          </a:p>
+        </p:txBody>
+      </p:sp>
+      <p:sp>
+        <p:nvSpPr>
+          <p:cNvPr id="28" name="Text 26"/>
+          <p:cNvSpPr/>
+          <p:nvPr/>
+        </p:nvSpPr>
+        <p:spPr>
+          <a:xfrm>
+            <a:off x="6812280" y="2926080"/>
+            <a:ext cx="1600200" cy="731520"/>
+          </a:xfrm>
+          <a:prstGeom prst="rect">
+            <a:avLst/>
+          </a:prstGeom>
+          <a:noFill/>
+          <a:ln/>
+        </p:spPr>
+        <p:txBody>
+          <a:bodyPr wrap="square" rtlCol="0" anchor="ctr"/>
+          <a:lstStyle/>
+          <a:p>
+            <a:pPr algn="ctr" indent="0" marL="0">
+              <a:lnSpc>
+                <a:spcPct val="150000"/>
+              </a:lnSpc>
+              <a:buNone/>
+            </a:pPr>
+            <a:r>
+              <a:rPr lang="en-US" sz="1000" dirty="0">
                 <a:solidFill>
                   <a:srgbClr val="7A6B5D"/>
                 </a:solidFill>
               </a:rPr>
-              <a:t>Canvas 生成精美卡片，记录思维陷阱→认知重构→微行动，可保存分享</a:t>
-            </a:r>
-            <a:endParaRPr lang="en-US" sz="1100" dirty="0"/>
-          </a:p>
-        </p:txBody>
-      </p:sp>
-      <p:sp>
-        <p:nvSpPr>
-          <p:cNvPr id="21" name="Shape 19"/>
-          <p:cNvSpPr/>
-          <p:nvPr/>
-        </p:nvSpPr>
-        <p:spPr>
-          <a:xfrm>
-            <a:off x="640080" y="4114800"/>
-            <a:ext cx="502920" cy="502920"/>
-          </a:xfrm>
-          <a:prstGeom prst="roundRect">
-            <a:avLst>
-              <a:gd name="adj" fmla="val 14545"/>
-            </a:avLst>
-          </a:prstGeom>
-          <a:solidFill>
-            <a:srgbClr val="7DD3FC"/>
-          </a:solidFill>
-          <a:ln/>
-        </p:spPr>
-      </p:sp>
-      <p:sp>
-        <p:nvSpPr>
-          <p:cNvPr id="22" name="Text 20"/>
-          <p:cNvSpPr/>
-          <p:nvPr/>
-        </p:nvSpPr>
-        <p:spPr>
-          <a:xfrm>
-            <a:off x="640080" y="4114800"/>
-            <a:ext cx="502920" cy="502920"/>
-          </a:xfrm>
-          <a:prstGeom prst="rect">
-            <a:avLst/>
-          </a:prstGeom>
-          <a:noFill/>
-          <a:ln/>
-        </p:spPr>
-        <p:txBody>
-          <a:bodyPr wrap="square" rtlCol="0" anchor="ctr"/>
-          <a:lstStyle/>
-          <a:p>
-            <a:pPr algn="ctr" indent="0" marL="0">
-              <a:buNone/>
-            </a:pPr>
-            <a:r>
-              <a:rPr lang="en-US" sz="1800" b="1" dirty="0">
-                <a:solidFill>
-                  <a:srgbClr val="FFFFFF"/>
-                </a:solidFill>
-                <a:latin typeface="Noto Serif SC" pitchFamily="34" charset="0"/>
-                <a:ea typeface="Noto Serif SC" pitchFamily="34" charset="-122"/>
-                <a:cs typeface="Noto Serif SC" pitchFamily="34" charset="-120"/>
-              </a:rPr>
-              <a:t>5</a:t>
-            </a:r>
-            <a:endParaRPr lang="en-US" sz="1800" dirty="0"/>
-          </a:p>
-        </p:txBody>
-      </p:sp>
-      <p:sp>
-        <p:nvSpPr>
-          <p:cNvPr id="23" name="Text 21"/>
-          <p:cNvSpPr/>
-          <p:nvPr/>
-        </p:nvSpPr>
-        <p:spPr>
-          <a:xfrm>
-            <a:off x="1325880" y="4114800"/>
-            <a:ext cx="2743200" cy="274320"/>
-          </a:xfrm>
-          <a:prstGeom prst="rect">
-            <a:avLst/>
-          </a:prstGeom>
-          <a:noFill/>
-          <a:ln/>
-        </p:spPr>
-        <p:txBody>
-          <a:bodyPr wrap="square" lIns="0" tIns="0" rIns="0" bIns="0" rtlCol="0" anchor="ctr"/>
-          <a:lstStyle/>
-          <a:p>
-            <a:pPr indent="0" marL="0">
-              <a:buNone/>
-            </a:pPr>
-            <a:r>
-              <a:rPr lang="en-US" sz="1400" b="1" dirty="0">
-                <a:solidFill>
-                  <a:srgbClr val="3D2E1F"/>
-                </a:solidFill>
-                <a:latin typeface="Noto Serif SC" pitchFamily="34" charset="0"/>
-                <a:ea typeface="Noto Serif SC" pitchFamily="34" charset="-122"/>
-                <a:cs typeface="Noto Serif SC" pitchFamily="34" charset="-120"/>
-              </a:rPr>
-              <a:t>隐私优先 + 零门槛</a:t>
-            </a:r>
-            <a:endParaRPr lang="en-US" sz="1400" dirty="0"/>
-          </a:p>
-        </p:txBody>
-      </p:sp>
-      <p:sp>
-        <p:nvSpPr>
-          <p:cNvPr id="24" name="Text 22"/>
-          <p:cNvSpPr/>
-          <p:nvPr/>
-        </p:nvSpPr>
-        <p:spPr>
-          <a:xfrm>
-            <a:off x="1325880" y="4370832"/>
-            <a:ext cx="6858000" cy="274320"/>
-          </a:xfrm>
-          <a:prstGeom prst="rect">
-            <a:avLst/>
-          </a:prstGeom>
-          <a:noFill/>
-          <a:ln/>
-        </p:spPr>
-        <p:txBody>
-          <a:bodyPr wrap="square" lIns="0" tIns="0" rIns="0" bIns="0" rtlCol="0" anchor="ctr"/>
-          <a:lstStyle/>
-          <a:p>
-            <a:pPr indent="0" marL="0">
-              <a:buNone/>
-            </a:pPr>
-            <a:r>
-              <a:rPr lang="en-US" sz="1100" dirty="0">
+              <a:t>感恩练习帮助大脑</a:t>
+            </a:r>
+            <a:endParaRPr lang="en-US" sz="1000" dirty="0"/>
+          </a:p>
+          <a:p>
+            <a:pPr algn="ctr" indent="0" marL="0">
+              <a:lnSpc>
+                <a:spcPct val="150000"/>
+              </a:lnSpc>
+              <a:buNone/>
+            </a:pPr>
+            <a:r>
+              <a:rPr lang="en-US" sz="1000" dirty="0">
                 <a:solidFill>
                   <a:srgbClr val="7A6B5D"/>
                 </a:solidFill>
               </a:rPr>
-              <a:t>数据保存在浏览器本地，不上传服务器，无需注册，设置 API Key 即可使用</a:t>
-            </a:r>
-            <a:endParaRPr lang="en-US" sz="1100" dirty="0"/>
+              <a:t>关注积极面，提升幸福感</a:t>
+            </a:r>
+            <a:endParaRPr lang="en-US" sz="1000" dirty="0"/>
+          </a:p>
+        </p:txBody>
+      </p:sp>
+      <p:sp>
+        <p:nvSpPr>
+          <p:cNvPr id="29" name="Text 27"/>
+          <p:cNvSpPr/>
+          <p:nvPr/>
+        </p:nvSpPr>
+        <p:spPr>
+          <a:xfrm>
+            <a:off x="6812280" y="3749040"/>
+            <a:ext cx="1600200" cy="274320"/>
+          </a:xfrm>
+          <a:prstGeom prst="rect">
+            <a:avLst/>
+          </a:prstGeom>
+          <a:noFill/>
+          <a:ln/>
+        </p:spPr>
+        <p:txBody>
+          <a:bodyPr wrap="square" rtlCol="0" anchor="ctr"/>
+          <a:lstStyle/>
+          <a:p>
+            <a:pPr algn="ctr" indent="0" marL="0">
+              <a:buNone/>
+            </a:pPr>
+            <a:r>
+              <a:rPr lang="en-US" sz="1000" b="1" dirty="0">
+                <a:solidFill>
+                  <a:srgbClr val="F6A623"/>
+                </a:solidFill>
+              </a:rPr>
+              <a:t>→ 感恩日记功能</a:t>
+            </a:r>
+            <a:endParaRPr lang="en-US" sz="1000" dirty="0"/>
           </a:p>
         </p:txBody>
       </p:sp>
@@ -9233,14 +10232,14 @@
         </p:nvSpPr>
         <p:spPr>
           <a:xfrm>
-            <a:off x="7315200" y="-457200"/>
-            <a:ext cx="2286000" cy="2286000"/>
+            <a:off x="-457200" y="-731520"/>
+            <a:ext cx="2743200" cy="2743200"/>
           </a:xfrm>
           <a:prstGeom prst="ellipse">
             <a:avLst/>
           </a:prstGeom>
           <a:solidFill>
-            <a:srgbClr val="86C7A3">
+            <a:srgbClr val="F6A623">
               <a:alpha val="8000"/>
             </a:srgbClr>
           </a:solidFill>
@@ -9277,7 +10276,7 @@
                   <a:srgbClr val="F6A623"/>
                 </a:solidFill>
               </a:rPr>
-              <a:t>实践成果</a:t>
+              <a:t>创新亮点</a:t>
             </a:r>
             <a:endParaRPr lang="en-US" sz="1000" dirty="0"/>
           </a:p>
@@ -9316,7 +10315,7 @@
                 <a:ea typeface="Noto Serif SC" pitchFamily="34" charset="-122"/>
                 <a:cs typeface="Noto Serif SC" pitchFamily="34" charset="-120"/>
               </a:rPr>
-              <a:t>连续 7 天实践，效果显著</a:t>
+              <a:t>五大创新亮点</a:t>
             </a:r>
             <a:endParaRPr lang="en-US" sz="2800" dirty="0"/>
           </a:p>
@@ -9324,141 +10323,91 @@
       </p:sp>
       <p:sp>
         <p:nvSpPr>
-          <p:cNvPr id="5" name="Text 3"/>
-          <p:cNvSpPr/>
-          <p:nvPr/>
-        </p:nvSpPr>
-        <p:spPr>
-          <a:xfrm>
-            <a:off x="640080" y="1188720"/>
-            <a:ext cx="7315200" cy="274320"/>
-          </a:xfrm>
-          <a:prstGeom prst="rect">
-            <a:avLst/>
-          </a:prstGeom>
-          <a:noFill/>
-          <a:ln/>
-        </p:spPr>
-        <p:txBody>
-          <a:bodyPr wrap="square" rtlCol="0" anchor="ctr"/>
-          <a:lstStyle/>
-          <a:p>
-            <a:pPr indent="0" marL="0">
-              <a:buNone/>
-            </a:pPr>
-            <a:r>
-              <a:rPr lang="en-US" sz="1200" dirty="0">
-                <a:solidFill>
-                  <a:srgbClr val="7A6B5D"/>
-                </a:solidFill>
-              </a:rPr>
-              <a:t>小组成员亲身实践数据</a:t>
-            </a:r>
-            <a:endParaRPr lang="en-US" sz="1200" dirty="0"/>
-          </a:p>
-        </p:txBody>
-      </p:sp>
-      <p:sp>
-        <p:nvSpPr>
-          <p:cNvPr id="6" name="Shape 4"/>
-          <p:cNvSpPr/>
-          <p:nvPr/>
-        </p:nvSpPr>
-        <p:spPr>
-          <a:xfrm>
-            <a:off x="640080" y="1645920"/>
-            <a:ext cx="2468880" cy="1645920"/>
+          <p:cNvPr id="5" name="Shape 3"/>
+          <p:cNvSpPr/>
+          <p:nvPr/>
+        </p:nvSpPr>
+        <p:spPr>
+          <a:xfrm>
+            <a:off x="640080" y="1371600"/>
+            <a:ext cx="502920" cy="502920"/>
           </a:xfrm>
           <a:prstGeom prst="roundRect">
             <a:avLst>
-              <a:gd name="adj" fmla="val 8333"/>
+              <a:gd name="adj" fmla="val 14545"/>
             </a:avLst>
           </a:prstGeom>
           <a:solidFill>
-            <a:srgbClr val="FFFFFF">
-              <a:alpha val="80000"/>
-            </a:srgbClr>
+            <a:srgbClr val="F6A623"/>
           </a:solidFill>
-          <a:ln w="6350">
-            <a:solidFill>
-              <a:srgbClr val="E0D5C5"/>
-            </a:solidFill>
-            <a:prstDash val="solid"/>
-          </a:ln>
-          <a:effectLst>
-            <a:outerShdw sx="100000" sy="100000" kx="0" ky="0" algn="bl" rotWithShape="0" blurRad="76200" dist="25400" dir="8100000">
-              <a:srgbClr val="000000">
-                <a:alpha val="8000"/>
-              </a:srgbClr>
-            </a:outerShdw>
-          </a:effectLst>
-        </p:spPr>
-      </p:sp>
-      <p:sp>
-        <p:nvSpPr>
-          <p:cNvPr id="7" name="Text 5"/>
-          <p:cNvSpPr/>
-          <p:nvPr/>
-        </p:nvSpPr>
-        <p:spPr>
-          <a:xfrm>
-            <a:off x="640080" y="1737360"/>
-            <a:ext cx="2468880" cy="731520"/>
-          </a:xfrm>
-          <a:prstGeom prst="rect">
-            <a:avLst/>
-          </a:prstGeom>
-          <a:noFill/>
-          <a:ln/>
-        </p:spPr>
-        <p:txBody>
-          <a:bodyPr wrap="square" rtlCol="0" anchor="ctr"/>
-          <a:lstStyle/>
-          <a:p>
-            <a:pPr algn="ctr" indent="0" marL="0">
-              <a:buNone/>
-            </a:pPr>
-            <a:r>
-              <a:rPr lang="en-US" sz="4000" b="1" dirty="0">
-                <a:solidFill>
-                  <a:srgbClr val="86C7A3"/>
+          <a:ln/>
+        </p:spPr>
+      </p:sp>
+      <p:sp>
+        <p:nvSpPr>
+          <p:cNvPr id="6" name="Text 4"/>
+          <p:cNvSpPr/>
+          <p:nvPr/>
+        </p:nvSpPr>
+        <p:spPr>
+          <a:xfrm>
+            <a:off x="640080" y="1371600"/>
+            <a:ext cx="502920" cy="502920"/>
+          </a:xfrm>
+          <a:prstGeom prst="rect">
+            <a:avLst/>
+          </a:prstGeom>
+          <a:noFill/>
+          <a:ln/>
+        </p:spPr>
+        <p:txBody>
+          <a:bodyPr wrap="square" rtlCol="0" anchor="ctr"/>
+          <a:lstStyle/>
+          <a:p>
+            <a:pPr algn="ctr" indent="0" marL="0">
+              <a:buNone/>
+            </a:pPr>
+            <a:r>
+              <a:rPr lang="en-US" sz="1800" b="1" dirty="0">
+                <a:solidFill>
+                  <a:srgbClr val="FFFFFF"/>
                 </a:solidFill>
                 <a:latin typeface="Noto Serif SC" pitchFamily="34" charset="0"/>
                 <a:ea typeface="Noto Serif SC" pitchFamily="34" charset="-122"/>
                 <a:cs typeface="Noto Serif SC" pitchFamily="34" charset="-120"/>
               </a:rPr>
-              <a:t>65%</a:t>
-            </a:r>
-            <a:endParaRPr lang="en-US" sz="4000" dirty="0"/>
-          </a:p>
-        </p:txBody>
-      </p:sp>
-      <p:sp>
-        <p:nvSpPr>
-          <p:cNvPr id="8" name="Text 6"/>
-          <p:cNvSpPr/>
-          <p:nvPr/>
-        </p:nvSpPr>
-        <p:spPr>
-          <a:xfrm>
-            <a:off x="640080" y="2468880"/>
-            <a:ext cx="2468880" cy="320040"/>
-          </a:xfrm>
-          <a:prstGeom prst="rect">
-            <a:avLst/>
-          </a:prstGeom>
-          <a:noFill/>
-          <a:ln/>
-        </p:spPr>
-        <p:txBody>
-          <a:bodyPr wrap="square" rtlCol="0" anchor="ctr"/>
-          <a:lstStyle/>
-          <a:p>
-            <a:pPr algn="ctr" indent="0" marL="0">
-              <a:buNone/>
-            </a:pPr>
-            <a:r>
-              <a:rPr lang="en-US" sz="1300" b="1" dirty="0">
+              <a:t>1</a:t>
+            </a:r>
+            <a:endParaRPr lang="en-US" sz="1800" dirty="0"/>
+          </a:p>
+        </p:txBody>
+      </p:sp>
+      <p:sp>
+        <p:nvSpPr>
+          <p:cNvPr id="7" name="Text 5"/>
+          <p:cNvSpPr/>
+          <p:nvPr/>
+        </p:nvSpPr>
+        <p:spPr>
+          <a:xfrm>
+            <a:off x="1325880" y="1371600"/>
+            <a:ext cx="2743200" cy="274320"/>
+          </a:xfrm>
+          <a:prstGeom prst="rect">
+            <a:avLst/>
+          </a:prstGeom>
+          <a:noFill/>
+          <a:ln/>
+        </p:spPr>
+        <p:txBody>
+          <a:bodyPr wrap="square" lIns="0" tIns="0" rIns="0" bIns="0" rtlCol="0" anchor="ctr"/>
+          <a:lstStyle/>
+          <a:p>
+            <a:pPr indent="0" marL="0">
+              <a:buNone/>
+            </a:pPr>
+            <a:r>
+              <a:rPr lang="en-US" sz="1400" b="1" dirty="0">
                 <a:solidFill>
                   <a:srgbClr val="3D2E1F"/>
                 </a:solidFill>
@@ -9466,169 +10415,135 @@
                 <a:ea typeface="Noto Serif SC" pitchFamily="34" charset="-122"/>
                 <a:cs typeface="Noto Serif SC" pitchFamily="34" charset="-120"/>
               </a:rPr>
-              <a:t>内耗频率下降</a:t>
-            </a:r>
-            <a:endParaRPr lang="en-US" sz="1300" dirty="0"/>
-          </a:p>
-        </p:txBody>
-      </p:sp>
-      <p:sp>
-        <p:nvSpPr>
-          <p:cNvPr id="9" name="Text 7"/>
-          <p:cNvSpPr/>
-          <p:nvPr/>
-        </p:nvSpPr>
-        <p:spPr>
-          <a:xfrm>
-            <a:off x="640080" y="2788920"/>
-            <a:ext cx="2468880" cy="457200"/>
-          </a:xfrm>
-          <a:prstGeom prst="rect">
-            <a:avLst/>
-          </a:prstGeom>
-          <a:noFill/>
-          <a:ln/>
-        </p:spPr>
-        <p:txBody>
-          <a:bodyPr wrap="square" rtlCol="0" anchor="ctr"/>
-          <a:lstStyle/>
-          <a:p>
-            <a:pPr algn="ctr" indent="0" marL="0">
-              <a:lnSpc>
-                <a:spcPct val="140000"/>
-              </a:lnSpc>
-              <a:buNone/>
-            </a:pPr>
-            <a:r>
-              <a:rPr lang="en-US" sz="1000" dirty="0">
+              <a:t>AI 智能体架构</a:t>
+            </a:r>
+            <a:endParaRPr lang="en-US" sz="1400" dirty="0"/>
+          </a:p>
+        </p:txBody>
+      </p:sp>
+      <p:sp>
+        <p:nvSpPr>
+          <p:cNvPr id="8" name="Text 6"/>
+          <p:cNvSpPr/>
+          <p:nvPr/>
+        </p:nvSpPr>
+        <p:spPr>
+          <a:xfrm>
+            <a:off x="1325880" y="1627632"/>
+            <a:ext cx="6858000" cy="274320"/>
+          </a:xfrm>
+          <a:prstGeom prst="rect">
+            <a:avLst/>
+          </a:prstGeom>
+          <a:noFill/>
+          <a:ln/>
+        </p:spPr>
+        <p:txBody>
+          <a:bodyPr wrap="square" lIns="0" tIns="0" rIns="0" bIns="0" rtlCol="0" anchor="ctr"/>
+          <a:lstStyle/>
+          <a:p>
+            <a:pPr indent="0" marL="0">
+              <a:buNone/>
+            </a:pPr>
+            <a:r>
+              <a:rPr lang="en-US" sz="1100" dirty="0">
                 <a:solidFill>
                   <a:srgbClr val="7A6B5D"/>
                 </a:solidFill>
               </a:rPr>
-              <a:t>从每天多次内耗</a:t>
-            </a:r>
-            <a:endParaRPr lang="en-US" sz="1000" dirty="0"/>
-          </a:p>
-          <a:p>
-            <a:pPr algn="ctr" indent="0" marL="0">
-              <a:lnSpc>
-                <a:spcPct val="140000"/>
-              </a:lnSpc>
-              <a:buNone/>
-            </a:pPr>
-            <a:r>
-              <a:rPr lang="en-US" sz="1000" dirty="0">
-                <a:solidFill>
-                  <a:srgbClr val="7A6B5D"/>
-                </a:solidFill>
-              </a:rPr>
-              <a:t>减少到偶尔发生</a:t>
-            </a:r>
-            <a:endParaRPr lang="en-US" sz="1000" dirty="0"/>
-          </a:p>
-        </p:txBody>
-      </p:sp>
-      <p:sp>
-        <p:nvSpPr>
-          <p:cNvPr id="10" name="Shape 8"/>
-          <p:cNvSpPr/>
-          <p:nvPr/>
-        </p:nvSpPr>
-        <p:spPr>
-          <a:xfrm>
-            <a:off x="3291840" y="1645920"/>
-            <a:ext cx="2468880" cy="1645920"/>
+              <a:t>AI 自主判断用户需要，主动调用 14 种工具，从「被动回答」到「主动支持」</a:t>
+            </a:r>
+            <a:endParaRPr lang="en-US" sz="1100" dirty="0"/>
+          </a:p>
+        </p:txBody>
+      </p:sp>
+      <p:sp>
+        <p:nvSpPr>
+          <p:cNvPr id="9" name="Shape 7"/>
+          <p:cNvSpPr/>
+          <p:nvPr/>
+        </p:nvSpPr>
+        <p:spPr>
+          <a:xfrm>
+            <a:off x="640080" y="2057400"/>
+            <a:ext cx="502920" cy="502920"/>
           </a:xfrm>
           <a:prstGeom prst="roundRect">
             <a:avLst>
-              <a:gd name="adj" fmla="val 8333"/>
+              <a:gd name="adj" fmla="val 14545"/>
             </a:avLst>
           </a:prstGeom>
           <a:solidFill>
-            <a:srgbClr val="FFFFFF">
-              <a:alpha val="80000"/>
-            </a:srgbClr>
+            <a:srgbClr val="A78BFA"/>
           </a:solidFill>
-          <a:ln w="6350">
-            <a:solidFill>
-              <a:srgbClr val="E0D5C5"/>
-            </a:solidFill>
-            <a:prstDash val="solid"/>
-          </a:ln>
-          <a:effectLst>
-            <a:outerShdw sx="100000" sy="100000" kx="0" ky="0" algn="bl" rotWithShape="0" blurRad="76200" dist="25400" dir="8100000">
-              <a:srgbClr val="000000">
-                <a:alpha val="8000"/>
-              </a:srgbClr>
-            </a:outerShdw>
-          </a:effectLst>
-        </p:spPr>
-      </p:sp>
-      <p:sp>
-        <p:nvSpPr>
-          <p:cNvPr id="11" name="Text 9"/>
-          <p:cNvSpPr/>
-          <p:nvPr/>
-        </p:nvSpPr>
-        <p:spPr>
-          <a:xfrm>
-            <a:off x="3291840" y="1737360"/>
-            <a:ext cx="2468880" cy="731520"/>
-          </a:xfrm>
-          <a:prstGeom prst="rect">
-            <a:avLst/>
-          </a:prstGeom>
-          <a:noFill/>
-          <a:ln/>
-        </p:spPr>
-        <p:txBody>
-          <a:bodyPr wrap="square" rtlCol="0" anchor="ctr"/>
-          <a:lstStyle/>
-          <a:p>
-            <a:pPr algn="ctr" indent="0" marL="0">
-              <a:buNone/>
-            </a:pPr>
-            <a:r>
-              <a:rPr lang="en-US" sz="4000" b="1" dirty="0">
-                <a:solidFill>
-                  <a:srgbClr val="F6A623"/>
+          <a:ln/>
+        </p:spPr>
+      </p:sp>
+      <p:sp>
+        <p:nvSpPr>
+          <p:cNvPr id="10" name="Text 8"/>
+          <p:cNvSpPr/>
+          <p:nvPr/>
+        </p:nvSpPr>
+        <p:spPr>
+          <a:xfrm>
+            <a:off x="640080" y="2057400"/>
+            <a:ext cx="502920" cy="502920"/>
+          </a:xfrm>
+          <a:prstGeom prst="rect">
+            <a:avLst/>
+          </a:prstGeom>
+          <a:noFill/>
+          <a:ln/>
+        </p:spPr>
+        <p:txBody>
+          <a:bodyPr wrap="square" rtlCol="0" anchor="ctr"/>
+          <a:lstStyle/>
+          <a:p>
+            <a:pPr algn="ctr" indent="0" marL="0">
+              <a:buNone/>
+            </a:pPr>
+            <a:r>
+              <a:rPr lang="en-US" sz="1800" b="1" dirty="0">
+                <a:solidFill>
+                  <a:srgbClr val="FFFFFF"/>
                 </a:solidFill>
                 <a:latin typeface="Noto Serif SC" pitchFamily="34" charset="0"/>
                 <a:ea typeface="Noto Serif SC" pitchFamily="34" charset="-122"/>
                 <a:cs typeface="Noto Serif SC" pitchFamily="34" charset="-120"/>
               </a:rPr>
-              <a:t>↑</a:t>
-            </a:r>
-            <a:endParaRPr lang="en-US" sz="4000" dirty="0"/>
-          </a:p>
-        </p:txBody>
-      </p:sp>
-      <p:sp>
-        <p:nvSpPr>
-          <p:cNvPr id="12" name="Text 10"/>
-          <p:cNvSpPr/>
-          <p:nvPr/>
-        </p:nvSpPr>
-        <p:spPr>
-          <a:xfrm>
-            <a:off x="3291840" y="2468880"/>
-            <a:ext cx="2468880" cy="320040"/>
-          </a:xfrm>
-          <a:prstGeom prst="rect">
-            <a:avLst/>
-          </a:prstGeom>
-          <a:noFill/>
-          <a:ln/>
-        </p:spPr>
-        <p:txBody>
-          <a:bodyPr wrap="square" rtlCol="0" anchor="ctr"/>
-          <a:lstStyle/>
-          <a:p>
-            <a:pPr algn="ctr" indent="0" marL="0">
-              <a:buNone/>
-            </a:pPr>
-            <a:r>
-              <a:rPr lang="en-US" sz="1300" b="1" dirty="0">
+              <a:t>2</a:t>
+            </a:r>
+            <a:endParaRPr lang="en-US" sz="1800" dirty="0"/>
+          </a:p>
+        </p:txBody>
+      </p:sp>
+      <p:sp>
+        <p:nvSpPr>
+          <p:cNvPr id="11" name="Text 9"/>
+          <p:cNvSpPr/>
+          <p:nvPr/>
+        </p:nvSpPr>
+        <p:spPr>
+          <a:xfrm>
+            <a:off x="1325880" y="2057400"/>
+            <a:ext cx="2743200" cy="274320"/>
+          </a:xfrm>
+          <a:prstGeom prst="rect">
+            <a:avLst/>
+          </a:prstGeom>
+          <a:noFill/>
+          <a:ln/>
+        </p:spPr>
+        <p:txBody>
+          <a:bodyPr wrap="square" lIns="0" tIns="0" rIns="0" bIns="0" rtlCol="0" anchor="ctr"/>
+          <a:lstStyle/>
+          <a:p>
+            <a:pPr indent="0" marL="0">
+              <a:buNone/>
+            </a:pPr>
+            <a:r>
+              <a:rPr lang="en-US" sz="1400" b="1" dirty="0">
                 <a:solidFill>
                   <a:srgbClr val="3D2E1F"/>
                 </a:solidFill>
@@ -9636,169 +10551,135 @@
                 <a:ea typeface="Noto Serif SC" pitchFamily="34" charset="-122"/>
                 <a:cs typeface="Noto Serif SC" pitchFamily="34" charset="-120"/>
               </a:rPr>
-              <a:t>任务启动速度提升</a:t>
-            </a:r>
-            <a:endParaRPr lang="en-US" sz="1300" dirty="0"/>
-          </a:p>
-        </p:txBody>
-      </p:sp>
-      <p:sp>
-        <p:nvSpPr>
-          <p:cNvPr id="13" name="Text 11"/>
-          <p:cNvSpPr/>
-          <p:nvPr/>
-        </p:nvSpPr>
-        <p:spPr>
-          <a:xfrm>
-            <a:off x="3291840" y="2788920"/>
-            <a:ext cx="2468880" cy="457200"/>
-          </a:xfrm>
-          <a:prstGeom prst="rect">
-            <a:avLst/>
-          </a:prstGeom>
-          <a:noFill/>
-          <a:ln/>
-        </p:spPr>
-        <p:txBody>
-          <a:bodyPr wrap="square" rtlCol="0" anchor="ctr"/>
-          <a:lstStyle/>
-          <a:p>
-            <a:pPr algn="ctr" indent="0" marL="0">
-              <a:lnSpc>
-                <a:spcPct val="140000"/>
-              </a:lnSpc>
-              <a:buNone/>
-            </a:pPr>
-            <a:r>
-              <a:rPr lang="en-US" sz="1000" dirty="0">
+              <a:t>结构化疗愈流程</a:t>
+            </a:r>
+            <a:endParaRPr lang="en-US" sz="1400" dirty="0"/>
+          </a:p>
+        </p:txBody>
+      </p:sp>
+      <p:sp>
+        <p:nvSpPr>
+          <p:cNvPr id="12" name="Text 10"/>
+          <p:cNvSpPr/>
+          <p:nvPr/>
+        </p:nvSpPr>
+        <p:spPr>
+          <a:xfrm>
+            <a:off x="1325880" y="2313432"/>
+            <a:ext cx="6858000" cy="274320"/>
+          </a:xfrm>
+          <a:prstGeom prst="rect">
+            <a:avLst/>
+          </a:prstGeom>
+          <a:noFill/>
+          <a:ln/>
+        </p:spPr>
+        <p:txBody>
+          <a:bodyPr wrap="square" lIns="0" tIns="0" rIns="0" bIns="0" rtlCol="0" anchor="ctr"/>
+          <a:lstStyle/>
+          <a:p>
+            <a:pPr indent="0" marL="0">
+              <a:buNone/>
+            </a:pPr>
+            <a:r>
+              <a:rPr lang="en-US" sz="1100" dirty="0">
                 <a:solidFill>
                   <a:srgbClr val="7A6B5D"/>
                 </a:solidFill>
               </a:rPr>
-              <a:t>拖延时间明显缩短</a:t>
-            </a:r>
-            <a:endParaRPr lang="en-US" sz="1000" dirty="0"/>
-          </a:p>
-          <a:p>
-            <a:pPr algn="ctr" indent="0" marL="0">
-              <a:lnSpc>
-                <a:spcPct val="140000"/>
-              </a:lnSpc>
-              <a:buNone/>
-            </a:pPr>
-            <a:r>
-              <a:rPr lang="en-US" sz="1000" dirty="0">
-                <a:solidFill>
-                  <a:srgbClr val="7A6B5D"/>
-                </a:solidFill>
-              </a:rPr>
-              <a:t>行动力增强</a:t>
-            </a:r>
-            <a:endParaRPr lang="en-US" sz="1000" dirty="0"/>
-          </a:p>
-        </p:txBody>
-      </p:sp>
-      <p:sp>
-        <p:nvSpPr>
-          <p:cNvPr id="14" name="Shape 12"/>
-          <p:cNvSpPr/>
-          <p:nvPr/>
-        </p:nvSpPr>
-        <p:spPr>
-          <a:xfrm>
-            <a:off x="5943600" y="1645920"/>
-            <a:ext cx="2468880" cy="1645920"/>
+              <a:t>5步引导整合循证心理学方法，用户跟随引导即可完成认知重构</a:t>
+            </a:r>
+            <a:endParaRPr lang="en-US" sz="1100" dirty="0"/>
+          </a:p>
+        </p:txBody>
+      </p:sp>
+      <p:sp>
+        <p:nvSpPr>
+          <p:cNvPr id="13" name="Shape 11"/>
+          <p:cNvSpPr/>
+          <p:nvPr/>
+        </p:nvSpPr>
+        <p:spPr>
+          <a:xfrm>
+            <a:off x="640080" y="2743200"/>
+            <a:ext cx="502920" cy="502920"/>
           </a:xfrm>
           <a:prstGeom prst="roundRect">
             <a:avLst>
-              <a:gd name="adj" fmla="val 8333"/>
+              <a:gd name="adj" fmla="val 14545"/>
             </a:avLst>
           </a:prstGeom>
           <a:solidFill>
-            <a:srgbClr val="FFFFFF">
-              <a:alpha val="80000"/>
-            </a:srgbClr>
+            <a:srgbClr val="86C7A3"/>
           </a:solidFill>
-          <a:ln w="6350">
-            <a:solidFill>
-              <a:srgbClr val="E0D5C5"/>
-            </a:solidFill>
-            <a:prstDash val="solid"/>
-          </a:ln>
-          <a:effectLst>
-            <a:outerShdw sx="100000" sy="100000" kx="0" ky="0" algn="bl" rotWithShape="0" blurRad="76200" dist="25400" dir="8100000">
-              <a:srgbClr val="000000">
-                <a:alpha val="8000"/>
-              </a:srgbClr>
-            </a:outerShdw>
-          </a:effectLst>
-        </p:spPr>
-      </p:sp>
-      <p:sp>
-        <p:nvSpPr>
-          <p:cNvPr id="15" name="Text 13"/>
-          <p:cNvSpPr/>
-          <p:nvPr/>
-        </p:nvSpPr>
-        <p:spPr>
-          <a:xfrm>
-            <a:off x="5943600" y="1737360"/>
-            <a:ext cx="2468880" cy="731520"/>
-          </a:xfrm>
-          <a:prstGeom prst="rect">
-            <a:avLst/>
-          </a:prstGeom>
-          <a:noFill/>
-          <a:ln/>
-        </p:spPr>
-        <p:txBody>
-          <a:bodyPr wrap="square" rtlCol="0" anchor="ctr"/>
-          <a:lstStyle/>
-          <a:p>
-            <a:pPr algn="ctr" indent="0" marL="0">
-              <a:buNone/>
-            </a:pPr>
-            <a:r>
-              <a:rPr lang="en-US" sz="4000" b="1" dirty="0">
-                <a:solidFill>
-                  <a:srgbClr val="A78BFA"/>
+          <a:ln/>
+        </p:spPr>
+      </p:sp>
+      <p:sp>
+        <p:nvSpPr>
+          <p:cNvPr id="14" name="Text 12"/>
+          <p:cNvSpPr/>
+          <p:nvPr/>
+        </p:nvSpPr>
+        <p:spPr>
+          <a:xfrm>
+            <a:off x="640080" y="2743200"/>
+            <a:ext cx="502920" cy="502920"/>
+          </a:xfrm>
+          <a:prstGeom prst="rect">
+            <a:avLst/>
+          </a:prstGeom>
+          <a:noFill/>
+          <a:ln/>
+        </p:spPr>
+        <p:txBody>
+          <a:bodyPr wrap="square" rtlCol="0" anchor="ctr"/>
+          <a:lstStyle/>
+          <a:p>
+            <a:pPr algn="ctr" indent="0" marL="0">
+              <a:buNone/>
+            </a:pPr>
+            <a:r>
+              <a:rPr lang="en-US" sz="1800" b="1" dirty="0">
+                <a:solidFill>
+                  <a:srgbClr val="FFFFFF"/>
                 </a:solidFill>
                 <a:latin typeface="Noto Serif SC" pitchFamily="34" charset="0"/>
                 <a:ea typeface="Noto Serif SC" pitchFamily="34" charset="-122"/>
                 <a:cs typeface="Noto Serif SC" pitchFamily="34" charset="-120"/>
               </a:rPr>
-              <a:t>↓</a:t>
-            </a:r>
-            <a:endParaRPr lang="en-US" sz="4000" dirty="0"/>
-          </a:p>
-        </p:txBody>
-      </p:sp>
-      <p:sp>
-        <p:nvSpPr>
-          <p:cNvPr id="16" name="Text 14"/>
-          <p:cNvSpPr/>
-          <p:nvPr/>
-        </p:nvSpPr>
-        <p:spPr>
-          <a:xfrm>
-            <a:off x="5943600" y="2468880"/>
-            <a:ext cx="2468880" cy="320040"/>
-          </a:xfrm>
-          <a:prstGeom prst="rect">
-            <a:avLst/>
-          </a:prstGeom>
-          <a:noFill/>
-          <a:ln/>
-        </p:spPr>
-        <p:txBody>
-          <a:bodyPr wrap="square" rtlCol="0" anchor="ctr"/>
-          <a:lstStyle/>
-          <a:p>
-            <a:pPr algn="ctr" indent="0" marL="0">
-              <a:buNone/>
-            </a:pPr>
-            <a:r>
-              <a:rPr lang="en-US" sz="1300" b="1" dirty="0">
+              <a:t>3</a:t>
+            </a:r>
+            <a:endParaRPr lang="en-US" sz="1800" dirty="0"/>
+          </a:p>
+        </p:txBody>
+      </p:sp>
+      <p:sp>
+        <p:nvSpPr>
+          <p:cNvPr id="15" name="Text 13"/>
+          <p:cNvSpPr/>
+          <p:nvPr/>
+        </p:nvSpPr>
+        <p:spPr>
+          <a:xfrm>
+            <a:off x="1325880" y="2743200"/>
+            <a:ext cx="2743200" cy="274320"/>
+          </a:xfrm>
+          <a:prstGeom prst="rect">
+            <a:avLst/>
+          </a:prstGeom>
+          <a:noFill/>
+          <a:ln/>
+        </p:spPr>
+        <p:txBody>
+          <a:bodyPr wrap="square" lIns="0" tIns="0" rIns="0" bIns="0" rtlCol="0" anchor="ctr"/>
+          <a:lstStyle/>
+          <a:p>
+            <a:pPr indent="0" marL="0">
+              <a:buNone/>
+            </a:pPr>
+            <a:r>
+              <a:rPr lang="en-US" sz="1400" b="1" dirty="0">
                 <a:solidFill>
                   <a:srgbClr val="3D2E1F"/>
                 </a:solidFill>
@@ -9806,162 +10687,135 @@
                 <a:ea typeface="Noto Serif SC" pitchFamily="34" charset="-122"/>
                 <a:cs typeface="Noto Serif SC" pitchFamily="34" charset="-120"/>
               </a:rPr>
-              <a:t>焦虑自评分数降低</a:t>
-            </a:r>
-            <a:endParaRPr lang="en-US" sz="1300" dirty="0"/>
-          </a:p>
-        </p:txBody>
-      </p:sp>
-      <p:sp>
-        <p:nvSpPr>
-          <p:cNvPr id="17" name="Text 15"/>
-          <p:cNvSpPr/>
-          <p:nvPr/>
-        </p:nvSpPr>
-        <p:spPr>
-          <a:xfrm>
-            <a:off x="5943600" y="2788920"/>
-            <a:ext cx="2468880" cy="457200"/>
-          </a:xfrm>
-          <a:prstGeom prst="rect">
-            <a:avLst/>
-          </a:prstGeom>
-          <a:noFill/>
-          <a:ln/>
-        </p:spPr>
-        <p:txBody>
-          <a:bodyPr wrap="square" rtlCol="0" anchor="ctr"/>
-          <a:lstStyle/>
-          <a:p>
-            <a:pPr algn="ctr" indent="0" marL="0">
-              <a:lnSpc>
-                <a:spcPct val="140000"/>
-              </a:lnSpc>
-              <a:buNone/>
-            </a:pPr>
-            <a:r>
-              <a:rPr lang="en-US" sz="1000" dirty="0">
+              <a:t>数字媒体艺术疗愈</a:t>
+            </a:r>
+            <a:endParaRPr lang="en-US" sz="1400" dirty="0"/>
+          </a:p>
+        </p:txBody>
+      </p:sp>
+      <p:sp>
+        <p:nvSpPr>
+          <p:cNvPr id="16" name="Text 14"/>
+          <p:cNvSpPr/>
+          <p:nvPr/>
+        </p:nvSpPr>
+        <p:spPr>
+          <a:xfrm>
+            <a:off x="1325880" y="2999232"/>
+            <a:ext cx="6858000" cy="274320"/>
+          </a:xfrm>
+          <a:prstGeom prst="rect">
+            <a:avLst/>
+          </a:prstGeom>
+          <a:noFill/>
+          <a:ln/>
+        </p:spPr>
+        <p:txBody>
+          <a:bodyPr wrap="square" lIns="0" tIns="0" rIns="0" bIns="0" rtlCol="0" anchor="ctr"/>
+          <a:lstStyle/>
+          <a:p>
+            <a:pPr indent="0" marL="0">
+              <a:buNone/>
+            </a:pPr>
+            <a:r>
+              <a:rPr lang="en-US" sz="1100" dirty="0">
                 <a:solidFill>
                   <a:srgbClr val="7A6B5D"/>
                 </a:solidFill>
               </a:rPr>
-              <a:t>自我报告焦虑水平</a:t>
-            </a:r>
-            <a:endParaRPr lang="en-US" sz="1000" dirty="0"/>
-          </a:p>
-          <a:p>
-            <a:pPr algn="ctr" indent="0" marL="0">
-              <a:lnSpc>
-                <a:spcPct val="140000"/>
-              </a:lnSpc>
-              <a:buNone/>
-            </a:pPr>
-            <a:r>
-              <a:rPr lang="en-US" sz="1000" dirty="0">
-                <a:solidFill>
-                  <a:srgbClr val="7A6B5D"/>
-                </a:solidFill>
-              </a:rPr>
-              <a:t>持续下降</a:t>
-            </a:r>
-            <a:endParaRPr lang="en-US" sz="1000" dirty="0"/>
-          </a:p>
-        </p:txBody>
-      </p:sp>
-      <p:sp>
-        <p:nvSpPr>
-          <p:cNvPr id="18" name="Shape 16"/>
-          <p:cNvSpPr/>
-          <p:nvPr/>
-        </p:nvSpPr>
-        <p:spPr>
-          <a:xfrm>
-            <a:off x="640080" y="3566160"/>
-            <a:ext cx="7863840" cy="1097280"/>
+              <a:t>手势粒子互动、AI冥想引导、情绪涂鸦，用艺术与科技改善情绪</a:t>
+            </a:r>
+            <a:endParaRPr lang="en-US" sz="1100" dirty="0"/>
+          </a:p>
+        </p:txBody>
+      </p:sp>
+      <p:sp>
+        <p:nvSpPr>
+          <p:cNvPr id="17" name="Shape 15"/>
+          <p:cNvSpPr/>
+          <p:nvPr/>
+        </p:nvSpPr>
+        <p:spPr>
+          <a:xfrm>
+            <a:off x="640080" y="3429000"/>
+            <a:ext cx="502920" cy="502920"/>
           </a:xfrm>
           <a:prstGeom prst="roundRect">
             <a:avLst>
-              <a:gd name="adj" fmla="val 10000"/>
+              <a:gd name="adj" fmla="val 14545"/>
             </a:avLst>
           </a:prstGeom>
           <a:solidFill>
-            <a:srgbClr val="FEF3C7">
-              <a:alpha val="50000"/>
-            </a:srgbClr>
+            <a:srgbClr val="FDA085"/>
           </a:solidFill>
-          <a:ln w="6350">
-            <a:solidFill>
-              <a:srgbClr val="FDE68A"/>
-            </a:solidFill>
-            <a:prstDash val="solid"/>
-          </a:ln>
-        </p:spPr>
-      </p:sp>
-      <p:sp>
-        <p:nvSpPr>
-          <p:cNvPr id="19" name="Text 17"/>
-          <p:cNvSpPr/>
-          <p:nvPr/>
-        </p:nvSpPr>
-        <p:spPr>
-          <a:xfrm>
-            <a:off x="822960" y="3611880"/>
-            <a:ext cx="457200" cy="457200"/>
-          </a:xfrm>
-          <a:prstGeom prst="rect">
-            <a:avLst/>
-          </a:prstGeom>
-          <a:noFill/>
-          <a:ln/>
-        </p:spPr>
-        <p:txBody>
-          <a:bodyPr wrap="square" rtlCol="0" anchor="ctr"/>
-          <a:lstStyle/>
-          <a:p>
-            <a:pPr indent="0" marL="0">
-              <a:buNone/>
-            </a:pPr>
-            <a:r>
-              <a:rPr lang="en-US" sz="3600" dirty="0">
-                <a:solidFill>
-                  <a:srgbClr val="F6A623"/>
+          <a:ln/>
+        </p:spPr>
+      </p:sp>
+      <p:sp>
+        <p:nvSpPr>
+          <p:cNvPr id="18" name="Text 16"/>
+          <p:cNvSpPr/>
+          <p:nvPr/>
+        </p:nvSpPr>
+        <p:spPr>
+          <a:xfrm>
+            <a:off x="640080" y="3429000"/>
+            <a:ext cx="502920" cy="502920"/>
+          </a:xfrm>
+          <a:prstGeom prst="rect">
+            <a:avLst/>
+          </a:prstGeom>
+          <a:noFill/>
+          <a:ln/>
+        </p:spPr>
+        <p:txBody>
+          <a:bodyPr wrap="square" rtlCol="0" anchor="ctr"/>
+          <a:lstStyle/>
+          <a:p>
+            <a:pPr algn="ctr" indent="0" marL="0">
+              <a:buNone/>
+            </a:pPr>
+            <a:r>
+              <a:rPr lang="en-US" sz="1800" b="1" dirty="0">
+                <a:solidFill>
+                  <a:srgbClr val="FFFFFF"/>
                 </a:solidFill>
                 <a:latin typeface="Noto Serif SC" pitchFamily="34" charset="0"/>
                 <a:ea typeface="Noto Serif SC" pitchFamily="34" charset="-122"/>
                 <a:cs typeface="Noto Serif SC" pitchFamily="34" charset="-120"/>
               </a:rPr>
-              <a:t>"</a:t>
-            </a:r>
-            <a:endParaRPr lang="en-US" sz="3600" dirty="0"/>
-          </a:p>
-        </p:txBody>
-      </p:sp>
-      <p:sp>
-        <p:nvSpPr>
-          <p:cNvPr id="20" name="Text 18"/>
-          <p:cNvSpPr/>
-          <p:nvPr/>
-        </p:nvSpPr>
-        <p:spPr>
-          <a:xfrm>
-            <a:off x="1280160" y="3749040"/>
-            <a:ext cx="6858000" cy="365760"/>
-          </a:xfrm>
-          <a:prstGeom prst="rect">
-            <a:avLst/>
-          </a:prstGeom>
-          <a:noFill/>
-          <a:ln/>
-        </p:spPr>
-        <p:txBody>
-          <a:bodyPr wrap="square" rtlCol="0" anchor="ctr"/>
+              <a:t>4</a:t>
+            </a:r>
+            <a:endParaRPr lang="en-US" sz="1800" dirty="0"/>
+          </a:p>
+        </p:txBody>
+      </p:sp>
+      <p:sp>
+        <p:nvSpPr>
+          <p:cNvPr id="19" name="Text 17"/>
+          <p:cNvSpPr/>
+          <p:nvPr/>
+        </p:nvSpPr>
+        <p:spPr>
+          <a:xfrm>
+            <a:off x="1325880" y="3429000"/>
+            <a:ext cx="2743200" cy="274320"/>
+          </a:xfrm>
+          <a:prstGeom prst="rect">
+            <a:avLst/>
+          </a:prstGeom>
+          <a:noFill/>
+          <a:ln/>
+        </p:spPr>
+        <p:txBody>
+          <a:bodyPr wrap="square" lIns="0" tIns="0" rIns="0" bIns="0" rtlCol="0" anchor="ctr"/>
           <a:lstStyle/>
           <a:p>
             <a:pPr indent="0" marL="0">
               <a:buNone/>
             </a:pPr>
             <a:r>
-              <a:rPr lang="en-US" sz="1300" dirty="0">
+              <a:rPr lang="en-US" sz="1400" b="1" dirty="0">
                 <a:solidFill>
                   <a:srgbClr val="3D2E1F"/>
                 </a:solidFill>
@@ -9969,21 +10823,118 @@
                 <a:ea typeface="Noto Serif SC" pitchFamily="34" charset="-122"/>
                 <a:cs typeface="Noto Serif SC" pitchFamily="34" charset="-120"/>
               </a:rPr>
-              <a:t>做完 5 步疗愈流程后，我发现自己「来不及了」的想法变少了，开始做事变得更果断了。</a:t>
-            </a:r>
-            <a:endParaRPr lang="en-US" sz="1300" dirty="0"/>
-          </a:p>
-        </p:txBody>
-      </p:sp>
-      <p:sp>
-        <p:nvSpPr>
-          <p:cNvPr id="21" name="Text 19"/>
-          <p:cNvSpPr/>
-          <p:nvPr/>
-        </p:nvSpPr>
-        <p:spPr>
-          <a:xfrm>
-            <a:off x="1280160" y="4160520"/>
+              <a:t>多端适配 + 响应式</a:t>
+            </a:r>
+            <a:endParaRPr lang="en-US" sz="1400" dirty="0"/>
+          </a:p>
+        </p:txBody>
+      </p:sp>
+      <p:sp>
+        <p:nvSpPr>
+          <p:cNvPr id="20" name="Text 18"/>
+          <p:cNvSpPr/>
+          <p:nvPr/>
+        </p:nvSpPr>
+        <p:spPr>
+          <a:xfrm>
+            <a:off x="1325880" y="3685032"/>
+            <a:ext cx="6858000" cy="274320"/>
+          </a:xfrm>
+          <a:prstGeom prst="rect">
+            <a:avLst/>
+          </a:prstGeom>
+          <a:noFill/>
+          <a:ln/>
+        </p:spPr>
+        <p:txBody>
+          <a:bodyPr wrap="square" lIns="0" tIns="0" rIns="0" bIns="0" rtlCol="0" anchor="ctr"/>
+          <a:lstStyle/>
+          <a:p>
+            <a:pPr indent="0" marL="0">
+              <a:buNone/>
+            </a:pPr>
+            <a:r>
+              <a:rPr lang="en-US" sz="1100" dirty="0">
+                <a:solidFill>
+                  <a:srgbClr val="7A6B5D"/>
+                </a:solidFill>
+              </a:rPr>
+              <a:t>移动端底部导航、触摸手势、PWA支持，完整响应式体验</a:t>
+            </a:r>
+            <a:endParaRPr lang="en-US" sz="1100" dirty="0"/>
+          </a:p>
+        </p:txBody>
+      </p:sp>
+      <p:sp>
+        <p:nvSpPr>
+          <p:cNvPr id="21" name="Shape 19"/>
+          <p:cNvSpPr/>
+          <p:nvPr/>
+        </p:nvSpPr>
+        <p:spPr>
+          <a:xfrm>
+            <a:off x="640080" y="4114800"/>
+            <a:ext cx="502920" cy="502920"/>
+          </a:xfrm>
+          <a:prstGeom prst="roundRect">
+            <a:avLst>
+              <a:gd name="adj" fmla="val 14545"/>
+            </a:avLst>
+          </a:prstGeom>
+          <a:solidFill>
+            <a:srgbClr val="7DD3FC"/>
+          </a:solidFill>
+          <a:ln/>
+        </p:spPr>
+      </p:sp>
+      <p:sp>
+        <p:nvSpPr>
+          <p:cNvPr id="22" name="Text 20"/>
+          <p:cNvSpPr/>
+          <p:nvPr/>
+        </p:nvSpPr>
+        <p:spPr>
+          <a:xfrm>
+            <a:off x="640080" y="4114800"/>
+            <a:ext cx="502920" cy="502920"/>
+          </a:xfrm>
+          <a:prstGeom prst="rect">
+            <a:avLst/>
+          </a:prstGeom>
+          <a:noFill/>
+          <a:ln/>
+        </p:spPr>
+        <p:txBody>
+          <a:bodyPr wrap="square" rtlCol="0" anchor="ctr"/>
+          <a:lstStyle/>
+          <a:p>
+            <a:pPr algn="ctr" indent="0" marL="0">
+              <a:buNone/>
+            </a:pPr>
+            <a:r>
+              <a:rPr lang="en-US" sz="1800" b="1" dirty="0">
+                <a:solidFill>
+                  <a:srgbClr val="FFFFFF"/>
+                </a:solidFill>
+                <a:latin typeface="Noto Serif SC" pitchFamily="34" charset="0"/>
+                <a:ea typeface="Noto Serif SC" pitchFamily="34" charset="-122"/>
+                <a:cs typeface="Noto Serif SC" pitchFamily="34" charset="-120"/>
+              </a:rPr>
+              <a:t>5</a:t>
+            </a:r>
+            <a:endParaRPr lang="en-US" sz="1800" dirty="0"/>
+          </a:p>
+        </p:txBody>
+      </p:sp>
+      <p:sp>
+        <p:nvSpPr>
+          <p:cNvPr id="23" name="Text 21"/>
+          <p:cNvSpPr/>
+          <p:nvPr/>
+        </p:nvSpPr>
+        <p:spPr>
+          <a:xfrm>
+            <a:off x="1325880" y="4114800"/>
             <a:ext cx="2743200" cy="274320"/>
           </a:xfrm>
           <a:prstGeom prst="rect">
@@ -9993,21 +10944,60 @@
           <a:ln/>
         </p:spPr>
         <p:txBody>
-          <a:bodyPr wrap="square" rtlCol="0" anchor="ctr"/>
+          <a:bodyPr wrap="square" lIns="0" tIns="0" rIns="0" bIns="0" rtlCol="0" anchor="ctr"/>
           <a:lstStyle/>
           <a:p>
             <a:pPr indent="0" marL="0">
               <a:buNone/>
             </a:pPr>
             <a:r>
-              <a:rPr lang="en-US" sz="1000" dirty="0">
-                <a:solidFill>
-                  <a:srgbClr val="B8A99A"/>
-                </a:solidFill>
-              </a:rPr>
-              <a:t>—— 实践参与者反馈</a:t>
-            </a:r>
-            <a:endParaRPr lang="en-US" sz="1000" dirty="0"/>
+              <a:rPr lang="en-US" sz="1400" b="1" dirty="0">
+                <a:solidFill>
+                  <a:srgbClr val="3D2E1F"/>
+                </a:solidFill>
+                <a:latin typeface="Noto Serif SC" pitchFamily="34" charset="0"/>
+                <a:ea typeface="Noto Serif SC" pitchFamily="34" charset="-122"/>
+                <a:cs typeface="Noto Serif SC" pitchFamily="34" charset="-120"/>
+              </a:rPr>
+              <a:t>隐私优先 + 服务端代理</a:t>
+            </a:r>
+            <a:endParaRPr lang="en-US" sz="1400" dirty="0"/>
+          </a:p>
+        </p:txBody>
+      </p:sp>
+      <p:sp>
+        <p:nvSpPr>
+          <p:cNvPr id="24" name="Text 22"/>
+          <p:cNvSpPr/>
+          <p:nvPr/>
+        </p:nvSpPr>
+        <p:spPr>
+          <a:xfrm>
+            <a:off x="1325880" y="4370832"/>
+            <a:ext cx="6858000" cy="274320"/>
+          </a:xfrm>
+          <a:prstGeom prst="rect">
+            <a:avLst/>
+          </a:prstGeom>
+          <a:noFill/>
+          <a:ln/>
+        </p:spPr>
+        <p:txBody>
+          <a:bodyPr wrap="square" lIns="0" tIns="0" rIns="0" bIns="0" rtlCol="0" anchor="ctr"/>
+          <a:lstStyle/>
+          <a:p>
+            <a:pPr indent="0" marL="0">
+              <a:buNone/>
+            </a:pPr>
+            <a:r>
+              <a:rPr lang="en-US" sz="1100" dirty="0">
+                <a:solidFill>
+                  <a:srgbClr val="7A6B5D"/>
+                </a:solidFill>
+              </a:rPr>
+              <a:t>API Key 支持 .env 配置，服务端代理保护密钥，数据保存在浏览器本地</a:t>
+            </a:r>
+            <a:endParaRPr lang="en-US" sz="1100" dirty="0"/>
           </a:p>
         </p:txBody>
       </p:sp>
